--- a/ders/serbest-cizim-teknikleri/08-cizgilerle-siir-sarki-pafta-A3.pptx
+++ b/ders/serbest-cizim-teknikleri/08-cizgilerle-siir-sarki-pafta-A3.pptx
@@ -972,8 +972,8 @@
         </p:nvSpPr>
         <p:spPr>
           <a:xfrm>
-            <a:off x="685800" y="621792"/>
-            <a:ext cx="9317736" cy="219456"/>
+            <a:off x="685800" y="530352"/>
+            <a:ext cx="9317736" cy="164592"/>
           </a:xfrm>
           <a:prstGeom prst="rect">
             <a:avLst/>
@@ -989,17 +989,17 @@
               <a:buNone/>
             </a:pPr>
             <a:r>
-              <a:rPr lang="en-US" sz="1000" spc="160" kern="0" dirty="0">
+              <a:rPr lang="en-US" sz="950" spc="120" kern="0" dirty="0">
                 <a:solidFill>
-                  <a:srgbClr val="6B747C"/>
+                  <a:srgbClr val="707070"/>
                 </a:solidFill>
-                <a:latin typeface="Courier New" pitchFamily="34" charset="0"/>
-                <a:ea typeface="Courier New" pitchFamily="34" charset="-122"/>
-                <a:cs typeface="Courier New" pitchFamily="34" charset="-120"/>
+                <a:latin typeface="Arial" pitchFamily="34" charset="0"/>
+                <a:ea typeface="Arial" pitchFamily="34" charset="-122"/>
+                <a:cs typeface="Arial" pitchFamily="34" charset="-120"/>
               </a:rPr>
               <a:t>IMC321  ·  SERBEST ÇİZİM TEKNİKLERİ  ·  ÖDEV 1</a:t>
             </a:r>
-            <a:endParaRPr lang="en-US" sz="1000" dirty="0"/>
+            <a:endParaRPr lang="en-US" sz="950" dirty="0"/>
           </a:p>
         </p:txBody>
       </p:sp>
@@ -1011,8 +1011,8 @@
         </p:nvSpPr>
         <p:spPr>
           <a:xfrm>
-            <a:off x="685800" y="877824"/>
-            <a:ext cx="9317736" cy="768096"/>
+            <a:off x="685800" y="749808"/>
+            <a:ext cx="9317736" cy="365760"/>
           </a:xfrm>
           <a:prstGeom prst="rect">
             <a:avLst/>
@@ -1028,30 +1028,52 @@
               <a:buNone/>
             </a:pPr>
             <a:r>
-              <a:rPr lang="en-US" sz="4600" b="1" dirty="0">
+              <a:rPr lang="en-US" sz="2200" b="1" dirty="0">
                 <a:solidFill>
-                  <a:srgbClr val="1B1F24"/>
+                  <a:srgbClr val="1A1A1A"/>
                 </a:solidFill>
-                <a:latin typeface="Century Schoolbook" pitchFamily="34" charset="0"/>
-                <a:ea typeface="Century Schoolbook" pitchFamily="34" charset="-122"/>
-                <a:cs typeface="Century Schoolbook" pitchFamily="34" charset="-120"/>
+                <a:latin typeface="Arial" pitchFamily="34" charset="0"/>
+                <a:ea typeface="Arial" pitchFamily="34" charset="-122"/>
+                <a:cs typeface="Arial" pitchFamily="34" charset="-120"/>
               </a:rPr>
               <a:t>Çizgilerle Şiir</a:t>
             </a:r>
-            <a:endParaRPr lang="en-US" sz="4600" dirty="0"/>
-          </a:p>
-        </p:txBody>
-      </p:sp>
-      <p:sp>
-        <p:nvSpPr>
-          <p:cNvPr id="4" name="Text 2"/>
+            <a:endParaRPr lang="en-US" sz="2200" dirty="0"/>
+          </a:p>
+        </p:txBody>
+      </p:sp>
+      <p:sp>
+        <p:nvSpPr>
+          <p:cNvPr id="4" name="Shape 2"/>
+          <p:cNvSpPr/>
+          <p:nvPr/>
+        </p:nvSpPr>
+        <p:spPr>
+          <a:xfrm>
+            <a:off x="685800" y="1280160"/>
+            <a:ext cx="3108960" cy="3474720"/>
+          </a:xfrm>
+          <a:prstGeom prst="rect">
+            <a:avLst/>
+          </a:prstGeom>
+          <a:ln w="12700">
+            <a:solidFill>
+              <a:srgbClr val="1A1A1A"/>
+            </a:solidFill>
+            <a:prstDash val="solid"/>
+          </a:ln>
+        </p:spPr>
+      </p:sp>
+      <p:sp>
+        <p:nvSpPr>
+          <p:cNvPr id="5" name="Text 3"/>
           <p:cNvSpPr txBox="1"/>
           <p:nvPr/>
         </p:nvSpPr>
         <p:spPr>
           <a:xfrm>
-            <a:off x="685800" y="1682496"/>
-            <a:ext cx="9317736" cy="256032"/>
+            <a:off x="813816" y="1389888"/>
+            <a:ext cx="2852928" cy="182880"/>
           </a:xfrm>
           <a:prstGeom prst="rect">
             <a:avLst/>
@@ -1067,40 +1089,37 @@
               <a:buNone/>
             </a:pPr>
             <a:r>
-              <a:rPr lang="en-US" sz="1350" dirty="0">
+              <a:rPr lang="en-US" sz="950" b="1" spc="80" kern="0" dirty="0">
                 <a:solidFill>
-                  <a:srgbClr val="1B1F24"/>
+                  <a:srgbClr val="1A1A1A"/>
                 </a:solidFill>
-                <a:latin typeface="Calibri" pitchFamily="34" charset="0"/>
-                <a:ea typeface="Calibri" pitchFamily="34" charset="-122"/>
-                <a:cs typeface="Calibri" pitchFamily="34" charset="-120"/>
+                <a:latin typeface="Arial" pitchFamily="34" charset="0"/>
+                <a:ea typeface="Arial" pitchFamily="34" charset="-122"/>
+                <a:cs typeface="Arial" pitchFamily="34" charset="-120"/>
               </a:rPr>
-              <a:t>Seçtiğiniz şiiri çizgiyle anlatın — resmetmeden, okuduğunuzu çizginin diline çevirerek.</a:t>
-            </a:r>
-            <a:endParaRPr lang="en-US" sz="1350" dirty="0"/>
-          </a:p>
-        </p:txBody>
-      </p:sp>
-      <p:sp>
-        <p:nvSpPr>
-          <p:cNvPr id="5" name="Shape 3"/>
+              <a:t>ŞİİR</a:t>
+            </a:r>
+            <a:endParaRPr lang="en-US" sz="950" dirty="0"/>
+          </a:p>
+        </p:txBody>
+      </p:sp>
+      <p:sp>
+        <p:nvSpPr>
+          <p:cNvPr id="6" name="Shape 4"/>
           <p:cNvSpPr/>
           <p:nvPr/>
         </p:nvSpPr>
         <p:spPr>
           <a:xfrm>
-            <a:off x="685800" y="1993392"/>
-            <a:ext cx="9317736" cy="621792"/>
-          </a:xfrm>
-          <a:prstGeom prst="rect">
-            <a:avLst/>
-          </a:prstGeom>
-          <a:solidFill>
-            <a:srgbClr val="F4F6F8"/>
-          </a:solidFill>
+            <a:off x="3995928" y="1280160"/>
+            <a:ext cx="1868424" cy="713232"/>
+          </a:xfrm>
+          <a:prstGeom prst="rect">
+            <a:avLst/>
+          </a:prstGeom>
           <a:ln w="12700">
             <a:solidFill>
-              <a:srgbClr val="C9CFD5"/>
+              <a:srgbClr val="1A1A1A"/>
             </a:solidFill>
             <a:prstDash val="solid"/>
           </a:ln>
@@ -1108,14 +1127,14 @@
       </p:sp>
       <p:sp>
         <p:nvSpPr>
-          <p:cNvPr id="6" name="Text 4"/>
+          <p:cNvPr id="7" name="Text 5"/>
           <p:cNvSpPr txBox="1"/>
           <p:nvPr/>
         </p:nvSpPr>
         <p:spPr>
           <a:xfrm>
-            <a:off x="850392" y="2103120"/>
-            <a:ext cx="2843784" cy="182880"/>
+            <a:off x="4123944" y="1389888"/>
+            <a:ext cx="1612392" cy="182880"/>
           </a:xfrm>
           <a:prstGeom prst="rect">
             <a:avLst/>
@@ -1131,38 +1150,37 @@
               <a:buNone/>
             </a:pPr>
             <a:r>
-              <a:rPr lang="en-US" sz="850" spc="100" kern="0" dirty="0">
+              <a:rPr lang="en-US" sz="950" b="1" spc="80" kern="0" dirty="0">
                 <a:solidFill>
-                  <a:srgbClr val="6B747C"/>
+                  <a:srgbClr val="1A1A1A"/>
                 </a:solidFill>
-                <a:latin typeface="Courier New" pitchFamily="34" charset="0"/>
-                <a:ea typeface="Courier New" pitchFamily="34" charset="-122"/>
-                <a:cs typeface="Courier New" pitchFamily="34" charset="-120"/>
+                <a:latin typeface="Arial" pitchFamily="34" charset="0"/>
+                <a:ea typeface="Arial" pitchFamily="34" charset="-122"/>
+                <a:cs typeface="Arial" pitchFamily="34" charset="-120"/>
               </a:rPr>
               <a:t>AD SOYAD</a:t>
             </a:r>
-            <a:endParaRPr lang="en-US" sz="850" dirty="0"/>
-          </a:p>
-        </p:txBody>
-      </p:sp>
-      <p:sp>
-        <p:nvSpPr>
-          <p:cNvPr id="7" name="Shape 5"/>
+            <a:endParaRPr lang="en-US" sz="950" dirty="0"/>
+          </a:p>
+        </p:txBody>
+      </p:sp>
+      <p:sp>
+        <p:nvSpPr>
+          <p:cNvPr id="8" name="Shape 6"/>
           <p:cNvSpPr/>
           <p:nvPr/>
         </p:nvSpPr>
         <p:spPr>
           <a:xfrm>
-            <a:off x="850392" y="2523744"/>
-            <a:ext cx="2843784" cy="0"/>
-          </a:xfrm>
-          <a:prstGeom prst="line">
-            <a:avLst/>
-          </a:prstGeom>
-          <a:noFill/>
-          <a:ln w="11430">
+            <a:off x="6065520" y="1280160"/>
+            <a:ext cx="1868424" cy="713232"/>
+          </a:xfrm>
+          <a:prstGeom prst="rect">
+            <a:avLst/>
+          </a:prstGeom>
+          <a:ln w="12700">
             <a:solidFill>
-              <a:srgbClr val="1B1F24"/>
+              <a:srgbClr val="1A1A1A"/>
             </a:solidFill>
             <a:prstDash val="solid"/>
           </a:ln>
@@ -1170,14 +1188,14 @@
       </p:sp>
       <p:sp>
         <p:nvSpPr>
-          <p:cNvPr id="8" name="Text 6"/>
+          <p:cNvPr id="9" name="Text 7"/>
           <p:cNvSpPr txBox="1"/>
           <p:nvPr/>
         </p:nvSpPr>
         <p:spPr>
           <a:xfrm>
-            <a:off x="3922776" y="2103120"/>
-            <a:ext cx="2843784" cy="182880"/>
+            <a:off x="6193536" y="1389888"/>
+            <a:ext cx="1612392" cy="182880"/>
           </a:xfrm>
           <a:prstGeom prst="rect">
             <a:avLst/>
@@ -1193,38 +1211,37 @@
               <a:buNone/>
             </a:pPr>
             <a:r>
-              <a:rPr lang="en-US" sz="850" spc="100" kern="0" dirty="0">
+              <a:rPr lang="en-US" sz="950" b="1" spc="80" kern="0" dirty="0">
                 <a:solidFill>
-                  <a:srgbClr val="6B747C"/>
+                  <a:srgbClr val="1A1A1A"/>
                 </a:solidFill>
-                <a:latin typeface="Courier New" pitchFamily="34" charset="0"/>
-                <a:ea typeface="Courier New" pitchFamily="34" charset="-122"/>
-                <a:cs typeface="Courier New" pitchFamily="34" charset="-120"/>
+                <a:latin typeface="Arial" pitchFamily="34" charset="0"/>
+                <a:ea typeface="Arial" pitchFamily="34" charset="-122"/>
+                <a:cs typeface="Arial" pitchFamily="34" charset="-120"/>
               </a:rPr>
               <a:t>ÖĞRENCİ NO</a:t>
             </a:r>
-            <a:endParaRPr lang="en-US" sz="850" dirty="0"/>
-          </a:p>
-        </p:txBody>
-      </p:sp>
-      <p:sp>
-        <p:nvSpPr>
-          <p:cNvPr id="9" name="Shape 7"/>
+            <a:endParaRPr lang="en-US" sz="950" dirty="0"/>
+          </a:p>
+        </p:txBody>
+      </p:sp>
+      <p:sp>
+        <p:nvSpPr>
+          <p:cNvPr id="10" name="Shape 8"/>
           <p:cNvSpPr/>
           <p:nvPr/>
         </p:nvSpPr>
         <p:spPr>
           <a:xfrm>
-            <a:off x="3922776" y="2523744"/>
-            <a:ext cx="2843784" cy="0"/>
-          </a:xfrm>
-          <a:prstGeom prst="line">
-            <a:avLst/>
-          </a:prstGeom>
-          <a:noFill/>
-          <a:ln w="11430">
+            <a:off x="8135112" y="1280160"/>
+            <a:ext cx="1868424" cy="713232"/>
+          </a:xfrm>
+          <a:prstGeom prst="rect">
+            <a:avLst/>
+          </a:prstGeom>
+          <a:ln w="12700">
             <a:solidFill>
-              <a:srgbClr val="1B1F24"/>
+              <a:srgbClr val="1A1A1A"/>
             </a:solidFill>
             <a:prstDash val="solid"/>
           </a:ln>
@@ -1232,14 +1249,14 @@
       </p:sp>
       <p:sp>
         <p:nvSpPr>
-          <p:cNvPr id="10" name="Text 8"/>
+          <p:cNvPr id="11" name="Text 9"/>
           <p:cNvSpPr txBox="1"/>
           <p:nvPr/>
         </p:nvSpPr>
         <p:spPr>
           <a:xfrm>
-            <a:off x="6995160" y="2103120"/>
-            <a:ext cx="2843784" cy="182880"/>
+            <a:off x="8263128" y="1389888"/>
+            <a:ext cx="1612392" cy="182880"/>
           </a:xfrm>
           <a:prstGeom prst="rect">
             <a:avLst/>
@@ -1255,38 +1272,37 @@
               <a:buNone/>
             </a:pPr>
             <a:r>
-              <a:rPr lang="en-US" sz="850" spc="100" kern="0" dirty="0">
+              <a:rPr lang="en-US" sz="950" b="1" spc="80" kern="0" dirty="0">
                 <a:solidFill>
-                  <a:srgbClr val="6B747C"/>
+                  <a:srgbClr val="1A1A1A"/>
                 </a:solidFill>
-                <a:latin typeface="Courier New" pitchFamily="34" charset="0"/>
-                <a:ea typeface="Courier New" pitchFamily="34" charset="-122"/>
-                <a:cs typeface="Courier New" pitchFamily="34" charset="-120"/>
+                <a:latin typeface="Arial" pitchFamily="34" charset="0"/>
+                <a:ea typeface="Arial" pitchFamily="34" charset="-122"/>
+                <a:cs typeface="Arial" pitchFamily="34" charset="-120"/>
               </a:rPr>
               <a:t>TARİH</a:t>
             </a:r>
-            <a:endParaRPr lang="en-US" sz="850" dirty="0"/>
-          </a:p>
-        </p:txBody>
-      </p:sp>
-      <p:sp>
-        <p:nvSpPr>
-          <p:cNvPr id="11" name="Shape 9"/>
+            <a:endParaRPr lang="en-US" sz="950" dirty="0"/>
+          </a:p>
+        </p:txBody>
+      </p:sp>
+      <p:sp>
+        <p:nvSpPr>
+          <p:cNvPr id="12" name="Shape 10"/>
           <p:cNvSpPr/>
           <p:nvPr/>
         </p:nvSpPr>
         <p:spPr>
           <a:xfrm>
-            <a:off x="6995160" y="2523744"/>
-            <a:ext cx="2843784" cy="0"/>
-          </a:xfrm>
-          <a:prstGeom prst="line">
-            <a:avLst/>
-          </a:prstGeom>
-          <a:noFill/>
-          <a:ln w="11430">
+            <a:off x="3995928" y="2194560"/>
+            <a:ext cx="2903220" cy="841248"/>
+          </a:xfrm>
+          <a:prstGeom prst="rect">
+            <a:avLst/>
+          </a:prstGeom>
+          <a:ln w="12700">
             <a:solidFill>
-              <a:srgbClr val="1B1F24"/>
+              <a:srgbClr val="1A1A1A"/>
             </a:solidFill>
             <a:prstDash val="solid"/>
           </a:ln>
@@ -1294,22 +1310,60 @@
       </p:sp>
       <p:sp>
         <p:nvSpPr>
-          <p:cNvPr id="12" name="Shape 10"/>
+          <p:cNvPr id="13" name="Text 11"/>
+          <p:cNvSpPr txBox="1"/>
+          <p:nvPr/>
+        </p:nvSpPr>
+        <p:spPr>
+          <a:xfrm>
+            <a:off x="4123944" y="2304288"/>
+            <a:ext cx="2647188" cy="182880"/>
+          </a:xfrm>
+          <a:prstGeom prst="rect">
+            <a:avLst/>
+          </a:prstGeom>
+          <a:noFill/>
+          <a:ln/>
+        </p:spPr>
+        <p:txBody>
+          <a:bodyPr wrap="square" lIns="0" tIns="0" rIns="0" bIns="0" rtlCol="0" anchor="ctr"/>
+          <a:lstStyle/>
+          <a:p>
+            <a:pPr indent="0" marL="0">
+              <a:buNone/>
+            </a:pPr>
+            <a:r>
+              <a:rPr lang="en-US" sz="950" b="1" spc="80" kern="0" dirty="0">
+                <a:solidFill>
+                  <a:srgbClr val="1A1A1A"/>
+                </a:solidFill>
+                <a:latin typeface="Arial" pitchFamily="34" charset="0"/>
+                <a:ea typeface="Arial" pitchFamily="34" charset="-122"/>
+                <a:cs typeface="Arial" pitchFamily="34" charset="-120"/>
+              </a:rPr>
+              <a:t>ŞİİRİN ADI</a:t>
+            </a:r>
+            <a:endParaRPr lang="en-US" sz="950" dirty="0"/>
+          </a:p>
+        </p:txBody>
+      </p:sp>
+      <p:sp>
+        <p:nvSpPr>
+          <p:cNvPr id="14" name="Shape 12"/>
           <p:cNvSpPr/>
           <p:nvPr/>
         </p:nvSpPr>
         <p:spPr>
           <a:xfrm>
-            <a:off x="685800" y="2743200"/>
-            <a:ext cx="9317736" cy="0"/>
-          </a:xfrm>
-          <a:prstGeom prst="line">
-            <a:avLst/>
-          </a:prstGeom>
-          <a:noFill/>
-          <a:ln w="20320">
+            <a:off x="7100316" y="2194560"/>
+            <a:ext cx="2903220" cy="841248"/>
+          </a:xfrm>
+          <a:prstGeom prst="rect">
+            <a:avLst/>
+          </a:prstGeom>
+          <a:ln w="12700">
             <a:solidFill>
-              <a:srgbClr val="1B1F24"/>
+              <a:srgbClr val="1A1A1A"/>
             </a:solidFill>
             <a:prstDash val="solid"/>
           </a:ln>
@@ -1317,21 +1371,60 @@
       </p:sp>
       <p:sp>
         <p:nvSpPr>
-          <p:cNvPr id="13" name="Shape 11"/>
+          <p:cNvPr id="15" name="Text 13"/>
+          <p:cNvSpPr txBox="1"/>
+          <p:nvPr/>
+        </p:nvSpPr>
+        <p:spPr>
+          <a:xfrm>
+            <a:off x="7228332" y="2304288"/>
+            <a:ext cx="2647188" cy="182880"/>
+          </a:xfrm>
+          <a:prstGeom prst="rect">
+            <a:avLst/>
+          </a:prstGeom>
+          <a:noFill/>
+          <a:ln/>
+        </p:spPr>
+        <p:txBody>
+          <a:bodyPr wrap="square" lIns="0" tIns="0" rIns="0" bIns="0" rtlCol="0" anchor="ctr"/>
+          <a:lstStyle/>
+          <a:p>
+            <a:pPr indent="0" marL="0">
+              <a:buNone/>
+            </a:pPr>
+            <a:r>
+              <a:rPr lang="en-US" sz="950" b="1" spc="80" kern="0" dirty="0">
+                <a:solidFill>
+                  <a:srgbClr val="1A1A1A"/>
+                </a:solidFill>
+                <a:latin typeface="Arial" pitchFamily="34" charset="0"/>
+                <a:ea typeface="Arial" pitchFamily="34" charset="-122"/>
+                <a:cs typeface="Arial" pitchFamily="34" charset="-120"/>
+              </a:rPr>
+              <a:t>ŞAİR</a:t>
+            </a:r>
+            <a:endParaRPr lang="en-US" sz="950" dirty="0"/>
+          </a:p>
+        </p:txBody>
+      </p:sp>
+      <p:sp>
+        <p:nvSpPr>
+          <p:cNvPr id="16" name="Shape 14"/>
           <p:cNvSpPr/>
           <p:nvPr/>
         </p:nvSpPr>
         <p:spPr>
           <a:xfrm>
-            <a:off x="685800" y="2907792"/>
-            <a:ext cx="5532120" cy="2697480"/>
+            <a:off x="3995928" y="3236976"/>
+            <a:ext cx="6007608" cy="1517904"/>
           </a:xfrm>
           <a:prstGeom prst="rect">
             <a:avLst/>
           </a:prstGeom>
           <a:ln w="12700">
             <a:solidFill>
-              <a:srgbClr val="C9CFD5"/>
+              <a:srgbClr val="1A1A1A"/>
             </a:solidFill>
             <a:prstDash val="solid"/>
           </a:ln>
@@ -1339,14 +1432,14 @@
       </p:sp>
       <p:sp>
         <p:nvSpPr>
-          <p:cNvPr id="14" name="Text 12"/>
+          <p:cNvPr id="17" name="Text 15"/>
           <p:cNvSpPr txBox="1"/>
           <p:nvPr/>
         </p:nvSpPr>
         <p:spPr>
           <a:xfrm>
-            <a:off x="850392" y="3035808"/>
-            <a:ext cx="5202936" cy="201168"/>
+            <a:off x="4123944" y="3346704"/>
+            <a:ext cx="5751576" cy="182880"/>
           </a:xfrm>
           <a:prstGeom prst="rect">
             <a:avLst/>
@@ -1362,15 +1455,15 @@
               <a:buNone/>
             </a:pPr>
             <a:r>
-              <a:rPr lang="en-US" sz="950" spc="120" kern="0" dirty="0">
+              <a:rPr lang="en-US" sz="950" b="1" spc="80" kern="0" dirty="0">
                 <a:solidFill>
-                  <a:srgbClr val="2A6289"/>
+                  <a:srgbClr val="1A1A1A"/>
                 </a:solidFill>
-                <a:latin typeface="Courier New" pitchFamily="34" charset="0"/>
-                <a:ea typeface="Courier New" pitchFamily="34" charset="-122"/>
-                <a:cs typeface="Courier New" pitchFamily="34" charset="-120"/>
+                <a:latin typeface="Arial" pitchFamily="34" charset="0"/>
+                <a:ea typeface="Arial" pitchFamily="34" charset="-122"/>
+                <a:cs typeface="Arial" pitchFamily="34" charset="-120"/>
               </a:rPr>
-              <a:t>ŞİİR</a:t>
+              <a:t>ŞİİRİN DUYGULARI</a:t>
             </a:r>
             <a:endParaRPr lang="en-US" sz="950" dirty="0"/>
           </a:p>
@@ -1378,14 +1471,14 @@
       </p:sp>
       <p:sp>
         <p:nvSpPr>
-          <p:cNvPr id="15" name="Text 13"/>
+          <p:cNvPr id="18" name="Text 16"/>
           <p:cNvSpPr txBox="1"/>
           <p:nvPr/>
         </p:nvSpPr>
         <p:spPr>
           <a:xfrm>
-            <a:off x="850392" y="3346704"/>
-            <a:ext cx="2834640" cy="182880"/>
+            <a:off x="685800" y="4956048"/>
+            <a:ext cx="9317736" cy="164592"/>
           </a:xfrm>
           <a:prstGeom prst="rect">
             <a:avLst/>
@@ -1401,38 +1494,37 @@
               <a:buNone/>
             </a:pPr>
             <a:r>
-              <a:rPr lang="en-US" sz="850" spc="100" kern="0" dirty="0">
+              <a:rPr lang="en-US" sz="950" b="1" spc="80" kern="0" dirty="0">
                 <a:solidFill>
-                  <a:srgbClr val="6B747C"/>
+                  <a:srgbClr val="1A1A1A"/>
                 </a:solidFill>
-                <a:latin typeface="Courier New" pitchFamily="34" charset="0"/>
-                <a:ea typeface="Courier New" pitchFamily="34" charset="-122"/>
-                <a:cs typeface="Courier New" pitchFamily="34" charset="-120"/>
+                <a:latin typeface="Arial" pitchFamily="34" charset="0"/>
+                <a:ea typeface="Arial" pitchFamily="34" charset="-122"/>
+                <a:cs typeface="Arial" pitchFamily="34" charset="-120"/>
               </a:rPr>
-              <a:t>ŞİİRİN ADI</a:t>
-            </a:r>
-            <a:endParaRPr lang="en-US" sz="850" dirty="0"/>
-          </a:p>
-        </p:txBody>
-      </p:sp>
-      <p:sp>
-        <p:nvSpPr>
-          <p:cNvPr id="16" name="Shape 14"/>
+              <a:t>ÇİZİM ALANI</a:t>
+            </a:r>
+            <a:endParaRPr lang="en-US" sz="950" dirty="0"/>
+          </a:p>
+        </p:txBody>
+      </p:sp>
+      <p:sp>
+        <p:nvSpPr>
+          <p:cNvPr id="19" name="Shape 17"/>
           <p:cNvSpPr/>
           <p:nvPr/>
         </p:nvSpPr>
         <p:spPr>
           <a:xfrm>
-            <a:off x="850392" y="3767328"/>
-            <a:ext cx="2834640" cy="0"/>
-          </a:xfrm>
-          <a:prstGeom prst="line">
-            <a:avLst/>
-          </a:prstGeom>
-          <a:noFill/>
-          <a:ln w="11430">
+            <a:off x="685800" y="5148072"/>
+            <a:ext cx="9317736" cy="9317736"/>
+          </a:xfrm>
+          <a:prstGeom prst="rect">
+            <a:avLst/>
+          </a:prstGeom>
+          <a:ln w="12700">
             <a:solidFill>
-              <a:srgbClr val="1B1F24"/>
+              <a:srgbClr val="1A1A1A"/>
             </a:solidFill>
             <a:prstDash val="solid"/>
           </a:ln>
@@ -1440,14 +1532,14 @@
       </p:sp>
       <p:sp>
         <p:nvSpPr>
-          <p:cNvPr id="17" name="Text 15"/>
+          <p:cNvPr id="20" name="Text 18"/>
           <p:cNvSpPr txBox="1"/>
           <p:nvPr/>
         </p:nvSpPr>
         <p:spPr>
           <a:xfrm>
-            <a:off x="3867912" y="3346704"/>
-            <a:ext cx="2185416" cy="182880"/>
+            <a:off x="685800" y="14593824"/>
+            <a:ext cx="9317736" cy="164592"/>
           </a:xfrm>
           <a:prstGeom prst="rect">
             <a:avLst/>
@@ -1463,707 +1555,15 @@
               <a:buNone/>
             </a:pPr>
             <a:r>
-              <a:rPr lang="en-US" sz="850" spc="100" kern="0" dirty="0">
+              <a:rPr lang="en-US" sz="950" i="1" dirty="0">
                 <a:solidFill>
-                  <a:srgbClr val="6B747C"/>
+                  <a:srgbClr val="707070"/>
                 </a:solidFill>
-                <a:latin typeface="Courier New" pitchFamily="34" charset="0"/>
-                <a:ea typeface="Courier New" pitchFamily="34" charset="-122"/>
-                <a:cs typeface="Courier New" pitchFamily="34" charset="-120"/>
+                <a:latin typeface="Arial" pitchFamily="34" charset="0"/>
+                <a:ea typeface="Arial" pitchFamily="34" charset="-122"/>
+                <a:cs typeface="Arial" pitchFamily="34" charset="-120"/>
               </a:rPr>
-              <a:t>ŞAİR</a:t>
-            </a:r>
-            <a:endParaRPr lang="en-US" sz="850" dirty="0"/>
-          </a:p>
-        </p:txBody>
-      </p:sp>
-      <p:sp>
-        <p:nvSpPr>
-          <p:cNvPr id="18" name="Shape 16"/>
-          <p:cNvSpPr/>
-          <p:nvPr/>
-        </p:nvSpPr>
-        <p:spPr>
-          <a:xfrm>
-            <a:off x="3867912" y="3767328"/>
-            <a:ext cx="2185416" cy="0"/>
-          </a:xfrm>
-          <a:prstGeom prst="line">
-            <a:avLst/>
-          </a:prstGeom>
-          <a:noFill/>
-          <a:ln w="11430">
-            <a:solidFill>
-              <a:srgbClr val="1B1F24"/>
-            </a:solidFill>
-            <a:prstDash val="solid"/>
-          </a:ln>
-        </p:spPr>
-      </p:sp>
-      <p:sp>
-        <p:nvSpPr>
-          <p:cNvPr id="19" name="Text 17"/>
-          <p:cNvSpPr txBox="1"/>
-          <p:nvPr/>
-        </p:nvSpPr>
-        <p:spPr>
-          <a:xfrm>
-            <a:off x="850392" y="3931920"/>
-            <a:ext cx="5202936" cy="237744"/>
-          </a:xfrm>
-          <a:prstGeom prst="rect">
-            <a:avLst/>
-          </a:prstGeom>
-          <a:noFill/>
-          <a:ln/>
-        </p:spPr>
-        <p:txBody>
-          <a:bodyPr wrap="square" lIns="0" tIns="0" rIns="0" bIns="0" rtlCol="0" anchor="ctr"/>
-          <a:lstStyle/>
-          <a:p>
-            <a:pPr indent="0" marL="0">
-              <a:buNone/>
-            </a:pPr>
-            <a:r>
-              <a:rPr lang="en-US" sz="1050" i="1" dirty="0">
-                <a:solidFill>
-                  <a:srgbClr val="6B747C"/>
-                </a:solidFill>
-                <a:latin typeface="Calibri" pitchFamily="34" charset="0"/>
-                <a:ea typeface="Calibri" pitchFamily="34" charset="-122"/>
-                <a:cs typeface="Calibri" pitchFamily="34" charset="-120"/>
-              </a:rPr>
-              <a:t>Şiiri bu alana yazın ya da çıktısını yapıştırın.</a:t>
-            </a:r>
-            <a:endParaRPr lang="en-US" sz="1050" dirty="0"/>
-          </a:p>
-        </p:txBody>
-      </p:sp>
-      <p:sp>
-        <p:nvSpPr>
-          <p:cNvPr id="20" name="Shape 18"/>
-          <p:cNvSpPr/>
-          <p:nvPr/>
-        </p:nvSpPr>
-        <p:spPr>
-          <a:xfrm>
-            <a:off x="850392" y="4389120"/>
-            <a:ext cx="5202936" cy="0"/>
-          </a:xfrm>
-          <a:prstGeom prst="line">
-            <a:avLst/>
-          </a:prstGeom>
-          <a:noFill/>
-          <a:ln w="9525">
-            <a:solidFill>
-              <a:srgbClr val="E3E7EB"/>
-            </a:solidFill>
-            <a:prstDash val="solid"/>
-          </a:ln>
-        </p:spPr>
-      </p:sp>
-      <p:sp>
-        <p:nvSpPr>
-          <p:cNvPr id="21" name="Shape 19"/>
-          <p:cNvSpPr/>
-          <p:nvPr/>
-        </p:nvSpPr>
-        <p:spPr>
-          <a:xfrm>
-            <a:off x="850392" y="4645152"/>
-            <a:ext cx="5202936" cy="0"/>
-          </a:xfrm>
-          <a:prstGeom prst="line">
-            <a:avLst/>
-          </a:prstGeom>
-          <a:noFill/>
-          <a:ln w="9525">
-            <a:solidFill>
-              <a:srgbClr val="E3E7EB"/>
-            </a:solidFill>
-            <a:prstDash val="solid"/>
-          </a:ln>
-        </p:spPr>
-      </p:sp>
-      <p:sp>
-        <p:nvSpPr>
-          <p:cNvPr id="22" name="Shape 20"/>
-          <p:cNvSpPr/>
-          <p:nvPr/>
-        </p:nvSpPr>
-        <p:spPr>
-          <a:xfrm>
-            <a:off x="850392" y="4901184"/>
-            <a:ext cx="5202936" cy="0"/>
-          </a:xfrm>
-          <a:prstGeom prst="line">
-            <a:avLst/>
-          </a:prstGeom>
-          <a:noFill/>
-          <a:ln w="9525">
-            <a:solidFill>
-              <a:srgbClr val="E3E7EB"/>
-            </a:solidFill>
-            <a:prstDash val="solid"/>
-          </a:ln>
-        </p:spPr>
-      </p:sp>
-      <p:sp>
-        <p:nvSpPr>
-          <p:cNvPr id="23" name="Shape 21"/>
-          <p:cNvSpPr/>
-          <p:nvPr/>
-        </p:nvSpPr>
-        <p:spPr>
-          <a:xfrm>
-            <a:off x="850392" y="5157216"/>
-            <a:ext cx="5202936" cy="0"/>
-          </a:xfrm>
-          <a:prstGeom prst="line">
-            <a:avLst/>
-          </a:prstGeom>
-          <a:noFill/>
-          <a:ln w="9525">
-            <a:solidFill>
-              <a:srgbClr val="E3E7EB"/>
-            </a:solidFill>
-            <a:prstDash val="solid"/>
-          </a:ln>
-        </p:spPr>
-      </p:sp>
-      <p:sp>
-        <p:nvSpPr>
-          <p:cNvPr id="24" name="Shape 22"/>
-          <p:cNvSpPr/>
-          <p:nvPr/>
-        </p:nvSpPr>
-        <p:spPr>
-          <a:xfrm>
-            <a:off x="850392" y="5413248"/>
-            <a:ext cx="5202936" cy="0"/>
-          </a:xfrm>
-          <a:prstGeom prst="line">
-            <a:avLst/>
-          </a:prstGeom>
-          <a:noFill/>
-          <a:ln w="9525">
-            <a:solidFill>
-              <a:srgbClr val="E3E7EB"/>
-            </a:solidFill>
-            <a:prstDash val="solid"/>
-          </a:ln>
-        </p:spPr>
-      </p:sp>
-      <p:sp>
-        <p:nvSpPr>
-          <p:cNvPr id="25" name="Shape 23"/>
-          <p:cNvSpPr/>
-          <p:nvPr/>
-        </p:nvSpPr>
-        <p:spPr>
-          <a:xfrm>
-            <a:off x="6446520" y="2907792"/>
-            <a:ext cx="3557016" cy="932688"/>
-          </a:xfrm>
-          <a:prstGeom prst="rect">
-            <a:avLst/>
-          </a:prstGeom>
-          <a:solidFill>
-            <a:srgbClr val="F4F6F8"/>
-          </a:solidFill>
-          <a:ln w="12700">
-            <a:solidFill>
-              <a:srgbClr val="C9CFD5"/>
-            </a:solidFill>
-            <a:prstDash val="solid"/>
-          </a:ln>
-        </p:spPr>
-      </p:sp>
-      <p:sp>
-        <p:nvSpPr>
-          <p:cNvPr id="26" name="Text 24"/>
-          <p:cNvSpPr txBox="1"/>
-          <p:nvPr/>
-        </p:nvSpPr>
-        <p:spPr>
-          <a:xfrm>
-            <a:off x="6611112" y="3035808"/>
-            <a:ext cx="3227832" cy="201168"/>
-          </a:xfrm>
-          <a:prstGeom prst="rect">
-            <a:avLst/>
-          </a:prstGeom>
-          <a:noFill/>
-          <a:ln/>
-        </p:spPr>
-        <p:txBody>
-          <a:bodyPr wrap="square" lIns="0" tIns="0" rIns="0" bIns="0" rtlCol="0" anchor="ctr"/>
-          <a:lstStyle/>
-          <a:p>
-            <a:pPr indent="0" marL="0">
-              <a:buNone/>
-            </a:pPr>
-            <a:r>
-              <a:rPr lang="en-US" sz="950" spc="120" kern="0" dirty="0">
-                <a:solidFill>
-                  <a:srgbClr val="2A6289"/>
-                </a:solidFill>
-                <a:latin typeface="Courier New" pitchFamily="34" charset="0"/>
-                <a:ea typeface="Courier New" pitchFamily="34" charset="-122"/>
-                <a:cs typeface="Courier New" pitchFamily="34" charset="-120"/>
-              </a:rPr>
-              <a:t>HEDEFLEDİĞİM DUYGU</a:t>
-            </a:r>
-            <a:endParaRPr lang="en-US" sz="950" dirty="0"/>
-          </a:p>
-        </p:txBody>
-      </p:sp>
-      <p:sp>
-        <p:nvSpPr>
-          <p:cNvPr id="27" name="Text 25"/>
-          <p:cNvSpPr txBox="1"/>
-          <p:nvPr/>
-        </p:nvSpPr>
-        <p:spPr>
-          <a:xfrm>
-            <a:off x="6611112" y="3310128"/>
-            <a:ext cx="3227832" cy="310896"/>
-          </a:xfrm>
-          <a:prstGeom prst="rect">
-            <a:avLst/>
-          </a:prstGeom>
-          <a:noFill/>
-          <a:ln/>
-        </p:spPr>
-        <p:txBody>
-          <a:bodyPr wrap="square" lIns="0" tIns="0" rIns="0" bIns="0" rtlCol="0" anchor="ctr"/>
-          <a:lstStyle/>
-          <a:p>
-            <a:pPr indent="0" marL="0">
-              <a:lnSpc>
-                <a:spcPts val="1300"/>
-              </a:lnSpc>
-              <a:buNone/>
-            </a:pPr>
-            <a:r>
-              <a:rPr lang="en-US" sz="950" dirty="0">
-                <a:solidFill>
-                  <a:srgbClr val="1B1F24"/>
-                </a:solidFill>
-                <a:latin typeface="Calibri" pitchFamily="34" charset="0"/>
-                <a:ea typeface="Calibri" pitchFamily="34" charset="-122"/>
-                <a:cs typeface="Calibri" pitchFamily="34" charset="-120"/>
-              </a:rPr>
-              <a:t>tedirginlik · dinginlik · öfke · beklenti · yorgunluk · neşe · yalnızlık · panik · ağırlık · hafiflik · kararsızlık · kararlılık</a:t>
-            </a:r>
-            <a:endParaRPr lang="en-US" sz="950" dirty="0"/>
-          </a:p>
-        </p:txBody>
-      </p:sp>
-      <p:sp>
-        <p:nvSpPr>
-          <p:cNvPr id="28" name="Text 26"/>
-          <p:cNvSpPr txBox="1"/>
-          <p:nvPr/>
-        </p:nvSpPr>
-        <p:spPr>
-          <a:xfrm>
-            <a:off x="6611112" y="3621024"/>
-            <a:ext cx="3227832" cy="182880"/>
-          </a:xfrm>
-          <a:prstGeom prst="rect">
-            <a:avLst/>
-          </a:prstGeom>
-          <a:noFill/>
-          <a:ln/>
-        </p:spPr>
-        <p:txBody>
-          <a:bodyPr wrap="square" lIns="0" tIns="0" rIns="0" bIns="0" rtlCol="0" anchor="ctr"/>
-          <a:lstStyle/>
-          <a:p>
-            <a:pPr indent="0" marL="0">
-              <a:buNone/>
-            </a:pPr>
-            <a:r>
-              <a:rPr lang="en-US" sz="900" i="1" dirty="0">
-                <a:solidFill>
-                  <a:srgbClr val="6B747C"/>
-                </a:solidFill>
-                <a:latin typeface="Calibri" pitchFamily="34" charset="0"/>
-                <a:ea typeface="Calibri" pitchFamily="34" charset="-122"/>
-                <a:cs typeface="Calibri" pitchFamily="34" charset="-120"/>
-              </a:rPr>
-              <a:t>birini daire içine alın</a:t>
-            </a:r>
-            <a:endParaRPr lang="en-US" sz="900" dirty="0"/>
-          </a:p>
-        </p:txBody>
-      </p:sp>
-      <p:sp>
-        <p:nvSpPr>
-          <p:cNvPr id="29" name="Shape 27"/>
-          <p:cNvSpPr/>
-          <p:nvPr/>
-        </p:nvSpPr>
-        <p:spPr>
-          <a:xfrm>
-            <a:off x="6446520" y="3977640"/>
-            <a:ext cx="3557016" cy="1627632"/>
-          </a:xfrm>
-          <a:prstGeom prst="rect">
-            <a:avLst/>
-          </a:prstGeom>
-          <a:ln w="12700">
-            <a:solidFill>
-              <a:srgbClr val="C9CFD5"/>
-            </a:solidFill>
-            <a:prstDash val="solid"/>
-          </a:ln>
-        </p:spPr>
-      </p:sp>
-      <p:sp>
-        <p:nvSpPr>
-          <p:cNvPr id="30" name="Text 28"/>
-          <p:cNvSpPr txBox="1"/>
-          <p:nvPr/>
-        </p:nvSpPr>
-        <p:spPr>
-          <a:xfrm>
-            <a:off x="6611112" y="4105656"/>
-            <a:ext cx="3227832" cy="201168"/>
-          </a:xfrm>
-          <a:prstGeom prst="rect">
-            <a:avLst/>
-          </a:prstGeom>
-          <a:noFill/>
-          <a:ln/>
-        </p:spPr>
-        <p:txBody>
-          <a:bodyPr wrap="square" lIns="0" tIns="0" rIns="0" bIns="0" rtlCol="0" anchor="ctr"/>
-          <a:lstStyle/>
-          <a:p>
-            <a:pPr indent="0" marL="0">
-              <a:buNone/>
-            </a:pPr>
-            <a:r>
-              <a:rPr lang="en-US" sz="950" spc="120" kern="0" dirty="0">
-                <a:solidFill>
-                  <a:srgbClr val="2A6289"/>
-                </a:solidFill>
-                <a:latin typeface="Courier New" pitchFamily="34" charset="0"/>
-                <a:ea typeface="Courier New" pitchFamily="34" charset="-122"/>
-                <a:cs typeface="Courier New" pitchFamily="34" charset="-120"/>
-              </a:rPr>
-              <a:t>NEDEN BU ÇİZGİ?</a:t>
-            </a:r>
-            <a:endParaRPr lang="en-US" sz="950" dirty="0"/>
-          </a:p>
-        </p:txBody>
-      </p:sp>
-      <p:sp>
-        <p:nvSpPr>
-          <p:cNvPr id="31" name="Text 29"/>
-          <p:cNvSpPr txBox="1"/>
-          <p:nvPr/>
-        </p:nvSpPr>
-        <p:spPr>
-          <a:xfrm>
-            <a:off x="6611112" y="4361688"/>
-            <a:ext cx="3227832" cy="237744"/>
-          </a:xfrm>
-          <a:prstGeom prst="rect">
-            <a:avLst/>
-          </a:prstGeom>
-          <a:noFill/>
-          <a:ln/>
-        </p:spPr>
-        <p:txBody>
-          <a:bodyPr wrap="square" lIns="0" tIns="0" rIns="0" bIns="0" rtlCol="0" anchor="ctr"/>
-          <a:lstStyle/>
-          <a:p>
-            <a:pPr indent="0" marL="0">
-              <a:buNone/>
-            </a:pPr>
-            <a:r>
-              <a:rPr lang="en-US" sz="1050" i="1" dirty="0">
-                <a:solidFill>
-                  <a:srgbClr val="6B747C"/>
-                </a:solidFill>
-                <a:latin typeface="Calibri" pitchFamily="34" charset="0"/>
-                <a:ea typeface="Calibri" pitchFamily="34" charset="-122"/>
-                <a:cs typeface="Calibri" pitchFamily="34" charset="-120"/>
-              </a:rPr>
-              <a:t>Bu şiir için neden bu çizgiyi seçtiniz?</a:t>
-            </a:r>
-            <a:endParaRPr lang="en-US" sz="1050" dirty="0"/>
-          </a:p>
-        </p:txBody>
-      </p:sp>
-      <p:sp>
-        <p:nvSpPr>
-          <p:cNvPr id="32" name="Shape 30"/>
-          <p:cNvSpPr/>
-          <p:nvPr/>
-        </p:nvSpPr>
-        <p:spPr>
-          <a:xfrm>
-            <a:off x="6611112" y="4846320"/>
-            <a:ext cx="3227832" cy="0"/>
-          </a:xfrm>
-          <a:prstGeom prst="line">
-            <a:avLst/>
-          </a:prstGeom>
-          <a:noFill/>
-          <a:ln w="9525">
-            <a:solidFill>
-              <a:srgbClr val="E3E7EB"/>
-            </a:solidFill>
-            <a:prstDash val="solid"/>
-          </a:ln>
-        </p:spPr>
-      </p:sp>
-      <p:sp>
-        <p:nvSpPr>
-          <p:cNvPr id="33" name="Shape 31"/>
-          <p:cNvSpPr/>
-          <p:nvPr/>
-        </p:nvSpPr>
-        <p:spPr>
-          <a:xfrm>
-            <a:off x="6611112" y="5093208"/>
-            <a:ext cx="3227832" cy="0"/>
-          </a:xfrm>
-          <a:prstGeom prst="line">
-            <a:avLst/>
-          </a:prstGeom>
-          <a:noFill/>
-          <a:ln w="9525">
-            <a:solidFill>
-              <a:srgbClr val="E3E7EB"/>
-            </a:solidFill>
-            <a:prstDash val="solid"/>
-          </a:ln>
-        </p:spPr>
-      </p:sp>
-      <p:sp>
-        <p:nvSpPr>
-          <p:cNvPr id="34" name="Shape 32"/>
-          <p:cNvSpPr/>
-          <p:nvPr/>
-        </p:nvSpPr>
-        <p:spPr>
-          <a:xfrm>
-            <a:off x="6611112" y="5340096"/>
-            <a:ext cx="3227832" cy="0"/>
-          </a:xfrm>
-          <a:prstGeom prst="line">
-            <a:avLst/>
-          </a:prstGeom>
-          <a:noFill/>
-          <a:ln w="9525">
-            <a:solidFill>
-              <a:srgbClr val="E3E7EB"/>
-            </a:solidFill>
-            <a:prstDash val="solid"/>
-          </a:ln>
-        </p:spPr>
-      </p:sp>
-      <p:sp>
-        <p:nvSpPr>
-          <p:cNvPr id="35" name="Shape 33"/>
-          <p:cNvSpPr/>
-          <p:nvPr/>
-        </p:nvSpPr>
-        <p:spPr>
-          <a:xfrm>
-            <a:off x="1184148" y="6016752"/>
-            <a:ext cx="8321040" cy="8321040"/>
-          </a:xfrm>
-          <a:prstGeom prst="rect">
-            <a:avLst/>
-          </a:prstGeom>
-          <a:ln w="20320">
-            <a:solidFill>
-              <a:srgbClr val="1B1F24"/>
-            </a:solidFill>
-            <a:prstDash val="solid"/>
-          </a:ln>
-        </p:spPr>
-      </p:sp>
-      <p:sp>
-        <p:nvSpPr>
-          <p:cNvPr id="36" name="Text 34"/>
-          <p:cNvSpPr txBox="1"/>
-          <p:nvPr/>
-        </p:nvSpPr>
-        <p:spPr>
-          <a:xfrm>
-            <a:off x="1184148" y="5760720"/>
-            <a:ext cx="2743200" cy="201168"/>
-          </a:xfrm>
-          <a:prstGeom prst="rect">
-            <a:avLst/>
-          </a:prstGeom>
-          <a:noFill/>
-          <a:ln/>
-        </p:spPr>
-        <p:txBody>
-          <a:bodyPr wrap="square" lIns="0" tIns="0" rIns="0" bIns="0" rtlCol="0" anchor="ctr"/>
-          <a:lstStyle/>
-          <a:p>
-            <a:pPr indent="0" marL="0">
-              <a:buNone/>
-            </a:pPr>
-            <a:r>
-              <a:rPr lang="en-US" sz="950" spc="120" kern="0" dirty="0">
-                <a:solidFill>
-                  <a:srgbClr val="2A6289"/>
-                </a:solidFill>
-                <a:latin typeface="Courier New" pitchFamily="34" charset="0"/>
-                <a:ea typeface="Courier New" pitchFamily="34" charset="-122"/>
-                <a:cs typeface="Courier New" pitchFamily="34" charset="-120"/>
-              </a:rPr>
-              <a:t>ÇİZİM ALANI</a:t>
-            </a:r>
-            <a:endParaRPr lang="en-US" sz="950" dirty="0"/>
-          </a:p>
-        </p:txBody>
-      </p:sp>
-      <p:sp>
-        <p:nvSpPr>
-          <p:cNvPr id="37" name="Text 35"/>
-          <p:cNvSpPr txBox="1"/>
-          <p:nvPr/>
-        </p:nvSpPr>
-        <p:spPr>
-          <a:xfrm>
-            <a:off x="6761988" y="5760720"/>
-            <a:ext cx="2743200" cy="201168"/>
-          </a:xfrm>
-          <a:prstGeom prst="rect">
-            <a:avLst/>
-          </a:prstGeom>
-          <a:noFill/>
-          <a:ln/>
-        </p:spPr>
-        <p:txBody>
-          <a:bodyPr wrap="square" lIns="0" tIns="0" rIns="0" bIns="0" rtlCol="0" anchor="ctr"/>
-          <a:lstStyle/>
-          <a:p>
-            <a:pPr algn="r" indent="0" marL="0">
-              <a:buNone/>
-            </a:pPr>
-            <a:r>
-              <a:rPr lang="en-US" sz="950" dirty="0">
-                <a:solidFill>
-                  <a:srgbClr val="6B747C"/>
-                </a:solidFill>
-                <a:latin typeface="Courier New" pitchFamily="34" charset="0"/>
-                <a:ea typeface="Courier New" pitchFamily="34" charset="-122"/>
-                <a:cs typeface="Courier New" pitchFamily="34" charset="-120"/>
-              </a:rPr>
-              <a:t>23 × 23 cm  ·  taşmayın</a:t>
-            </a:r>
-            <a:endParaRPr lang="en-US" sz="950" dirty="0"/>
-          </a:p>
-        </p:txBody>
-      </p:sp>
-      <p:sp>
-        <p:nvSpPr>
-          <p:cNvPr id="38" name="Shape 36"/>
-          <p:cNvSpPr/>
-          <p:nvPr/>
-        </p:nvSpPr>
-        <p:spPr>
-          <a:xfrm>
-            <a:off x="685800" y="14557248"/>
-            <a:ext cx="9317736" cy="0"/>
-          </a:xfrm>
-          <a:prstGeom prst="line">
-            <a:avLst/>
-          </a:prstGeom>
-          <a:noFill/>
-          <a:ln w="15240">
-            <a:solidFill>
-              <a:srgbClr val="1B1F24"/>
-            </a:solidFill>
-            <a:prstDash val="solid"/>
-          </a:ln>
-        </p:spPr>
-      </p:sp>
-      <p:sp>
-        <p:nvSpPr>
-          <p:cNvPr id="39" name="Text 37"/>
-          <p:cNvSpPr txBox="1"/>
-          <p:nvPr/>
-        </p:nvSpPr>
-        <p:spPr>
-          <a:xfrm>
-            <a:off x="685800" y="14685264"/>
-            <a:ext cx="6858000" cy="237744"/>
-          </a:xfrm>
-          <a:prstGeom prst="rect">
-            <a:avLst/>
-          </a:prstGeom>
-          <a:noFill/>
-          <a:ln/>
-        </p:spPr>
-        <p:txBody>
-          <a:bodyPr wrap="square" lIns="0" tIns="0" rIns="0" bIns="0" rtlCol="0" anchor="ctr"/>
-          <a:lstStyle/>
-          <a:p>
-            <a:pPr indent="0" marL="0">
-              <a:buNone/>
-            </a:pPr>
-            <a:r>
-              <a:rPr lang="en-US" sz="1050" dirty="0">
-                <a:solidFill>
-                  <a:srgbClr val="1B1F24"/>
-                </a:solidFill>
-                <a:latin typeface="Calibri" pitchFamily="34" charset="0"/>
-                <a:ea typeface="Calibri" pitchFamily="34" charset="-122"/>
-                <a:cs typeface="Calibri" pitchFamily="34" charset="-120"/>
-              </a:rPr>
-              <a:t>Çalışmanızı bu kareye yerleştirin ya da doğrudan içine çizin.  ·  Yalnızca çizgi: yazı, sembol ve figür kullanılmaz.</a:t>
-            </a:r>
-            <a:endParaRPr lang="en-US" sz="1050" dirty="0"/>
-          </a:p>
-        </p:txBody>
-      </p:sp>
-      <p:sp>
-        <p:nvSpPr>
-          <p:cNvPr id="40" name="Text 38"/>
-          <p:cNvSpPr txBox="1"/>
-          <p:nvPr/>
-        </p:nvSpPr>
-        <p:spPr>
-          <a:xfrm>
-            <a:off x="7543800" y="14685264"/>
-            <a:ext cx="2459736" cy="237744"/>
-          </a:xfrm>
-          <a:prstGeom prst="rect">
-            <a:avLst/>
-          </a:prstGeom>
-          <a:noFill/>
-          <a:ln/>
-        </p:spPr>
-        <p:txBody>
-          <a:bodyPr wrap="square" lIns="0" tIns="0" rIns="0" bIns="0" rtlCol="0" anchor="ctr"/>
-          <a:lstStyle/>
-          <a:p>
-            <a:pPr algn="r" indent="0" marL="0">
-              <a:buNone/>
-            </a:pPr>
-            <a:r>
-              <a:rPr lang="en-US" sz="950" spc="120" kern="0" dirty="0">
-                <a:solidFill>
-                  <a:srgbClr val="2A6289"/>
-                </a:solidFill>
-                <a:latin typeface="Courier New" pitchFamily="34" charset="0"/>
-                <a:ea typeface="Courier New" pitchFamily="34" charset="-122"/>
-                <a:cs typeface="Courier New" pitchFamily="34" charset="-120"/>
-              </a:rPr>
-              <a:t>KAPADOKYA ÜNİVERSİTESİ</a:t>
+              <a:t>Yalnızca çizgi: yazı, sembol ve figür kullanılmaz.</a:t>
             </a:r>
             <a:endParaRPr lang="en-US" sz="950" dirty="0"/>
           </a:p>
@@ -2209,8 +1609,8 @@
         </p:nvSpPr>
         <p:spPr>
           <a:xfrm>
-            <a:off x="685800" y="621792"/>
-            <a:ext cx="7818120" cy="219456"/>
+            <a:off x="685800" y="530352"/>
+            <a:ext cx="9317736" cy="164592"/>
           </a:xfrm>
           <a:prstGeom prst="rect">
             <a:avLst/>
@@ -2226,17 +1626,17 @@
               <a:buNone/>
             </a:pPr>
             <a:r>
-              <a:rPr lang="en-US" sz="1000" spc="160" kern="0" dirty="0">
+              <a:rPr lang="en-US" sz="950" spc="120" kern="0" dirty="0">
                 <a:solidFill>
-                  <a:srgbClr val="6B747C"/>
+                  <a:srgbClr val="707070"/>
                 </a:solidFill>
-                <a:latin typeface="Courier New" pitchFamily="34" charset="0"/>
-                <a:ea typeface="Courier New" pitchFamily="34" charset="-122"/>
-                <a:cs typeface="Courier New" pitchFamily="34" charset="-120"/>
+                <a:latin typeface="Arial" pitchFamily="34" charset="0"/>
+                <a:ea typeface="Arial" pitchFamily="34" charset="-122"/>
+                <a:cs typeface="Arial" pitchFamily="34" charset="-120"/>
               </a:rPr>
               <a:t>IMC321  ·  SERBEST ÇİZİM TEKNİKLERİ  ·  ÖDEV 1</a:t>
             </a:r>
-            <a:endParaRPr lang="en-US" sz="1000" dirty="0"/>
+            <a:endParaRPr lang="en-US" sz="950" dirty="0"/>
           </a:p>
         </p:txBody>
       </p:sp>
@@ -2248,8 +1648,8 @@
         </p:nvSpPr>
         <p:spPr>
           <a:xfrm>
-            <a:off x="685800" y="877824"/>
-            <a:ext cx="7818120" cy="768096"/>
+            <a:off x="685800" y="749808"/>
+            <a:ext cx="9317736" cy="365760"/>
           </a:xfrm>
           <a:prstGeom prst="rect">
             <a:avLst/>
@@ -2265,30 +1665,52 @@
               <a:buNone/>
             </a:pPr>
             <a:r>
-              <a:rPr lang="en-US" sz="4600" b="1" dirty="0">
+              <a:rPr lang="en-US" sz="2200" b="1" dirty="0">
                 <a:solidFill>
-                  <a:srgbClr val="1B1F24"/>
+                  <a:srgbClr val="1A1A1A"/>
                 </a:solidFill>
-                <a:latin typeface="Century Schoolbook" pitchFamily="34" charset="0"/>
-                <a:ea typeface="Century Schoolbook" pitchFamily="34" charset="-122"/>
-                <a:cs typeface="Century Schoolbook" pitchFamily="34" charset="-120"/>
+                <a:latin typeface="Arial" pitchFamily="34" charset="0"/>
+                <a:ea typeface="Arial" pitchFamily="34" charset="-122"/>
+                <a:cs typeface="Arial" pitchFamily="34" charset="-120"/>
               </a:rPr>
               <a:t>Çizgilerle Şarkı</a:t>
             </a:r>
-            <a:endParaRPr lang="en-US" sz="4600" dirty="0"/>
-          </a:p>
-        </p:txBody>
-      </p:sp>
-      <p:sp>
-        <p:nvSpPr>
-          <p:cNvPr id="4" name="Text 2"/>
+            <a:endParaRPr lang="en-US" sz="2200" dirty="0"/>
+          </a:p>
+        </p:txBody>
+      </p:sp>
+      <p:sp>
+        <p:nvSpPr>
+          <p:cNvPr id="4" name="Shape 2"/>
+          <p:cNvSpPr/>
+          <p:nvPr/>
+        </p:nvSpPr>
+        <p:spPr>
+          <a:xfrm>
+            <a:off x="685800" y="1280160"/>
+            <a:ext cx="3108960" cy="1755648"/>
+          </a:xfrm>
+          <a:prstGeom prst="rect">
+            <a:avLst/>
+          </a:prstGeom>
+          <a:ln w="12700">
+            <a:solidFill>
+              <a:srgbClr val="1A1A1A"/>
+            </a:solidFill>
+            <a:prstDash val="solid"/>
+          </a:ln>
+        </p:spPr>
+      </p:sp>
+      <p:sp>
+        <p:nvSpPr>
+          <p:cNvPr id="5" name="Text 3"/>
           <p:cNvSpPr txBox="1"/>
           <p:nvPr/>
         </p:nvSpPr>
         <p:spPr>
           <a:xfrm>
-            <a:off x="685800" y="1682496"/>
-            <a:ext cx="7818120" cy="256032"/>
+            <a:off x="813816" y="1389888"/>
+            <a:ext cx="2852928" cy="182880"/>
           </a:xfrm>
           <a:prstGeom prst="rect">
             <a:avLst/>
@@ -2304,40 +1726,37 @@
               <a:buNone/>
             </a:pPr>
             <a:r>
-              <a:rPr lang="en-US" sz="1350" dirty="0">
+              <a:rPr lang="en-US" sz="950" b="1" spc="80" kern="0" dirty="0">
                 <a:solidFill>
-                  <a:srgbClr val="1B1F24"/>
+                  <a:srgbClr val="1A1A1A"/>
                 </a:solidFill>
-                <a:latin typeface="Calibri" pitchFamily="34" charset="0"/>
-                <a:ea typeface="Calibri" pitchFamily="34" charset="-122"/>
-                <a:cs typeface="Calibri" pitchFamily="34" charset="-120"/>
+                <a:latin typeface="Arial" pitchFamily="34" charset="0"/>
+                <a:ea typeface="Arial" pitchFamily="34" charset="-122"/>
+                <a:cs typeface="Arial" pitchFamily="34" charset="-120"/>
               </a:rPr>
-              <a:t>Seçtiğiniz şarkıyı çizgiyle anlatın — resmetmeden, duyduğunuzu çizginin diline çevirerek.</a:t>
-            </a:r>
-            <a:endParaRPr lang="en-US" sz="1350" dirty="0"/>
-          </a:p>
-        </p:txBody>
-      </p:sp>
-      <p:sp>
-        <p:nvSpPr>
-          <p:cNvPr id="5" name="Shape 3"/>
+              <a:t>KAREKOD</a:t>
+            </a:r>
+            <a:endParaRPr lang="en-US" sz="950" dirty="0"/>
+          </a:p>
+        </p:txBody>
+      </p:sp>
+      <p:sp>
+        <p:nvSpPr>
+          <p:cNvPr id="6" name="Shape 4"/>
           <p:cNvSpPr/>
           <p:nvPr/>
         </p:nvSpPr>
         <p:spPr>
           <a:xfrm>
-            <a:off x="8778240" y="621792"/>
-            <a:ext cx="1225296" cy="1335024"/>
-          </a:xfrm>
-          <a:prstGeom prst="rect">
-            <a:avLst/>
-          </a:prstGeom>
-          <a:solidFill>
-            <a:srgbClr val="F4F6F8"/>
-          </a:solidFill>
+            <a:off x="685800" y="3236976"/>
+            <a:ext cx="3108960" cy="1517904"/>
+          </a:xfrm>
+          <a:prstGeom prst="rect">
+            <a:avLst/>
+          </a:prstGeom>
           <a:ln w="12700">
             <a:solidFill>
-              <a:srgbClr val="C9CFD5"/>
+              <a:srgbClr val="1A1A1A"/>
             </a:solidFill>
             <a:prstDash val="solid"/>
           </a:ln>
@@ -2345,14 +1764,14 @@
       </p:sp>
       <p:sp>
         <p:nvSpPr>
-          <p:cNvPr id="6" name="Text 4"/>
+          <p:cNvPr id="7" name="Text 5"/>
           <p:cNvSpPr txBox="1"/>
           <p:nvPr/>
         </p:nvSpPr>
         <p:spPr>
           <a:xfrm>
-            <a:off x="8778240" y="731520"/>
-            <a:ext cx="1225296" cy="182880"/>
+            <a:off x="813816" y="3346704"/>
+            <a:ext cx="2852928" cy="182880"/>
           </a:xfrm>
           <a:prstGeom prst="rect">
             <a:avLst/>
@@ -2364,108 +1783,41 @@
           <a:bodyPr wrap="square" lIns="0" tIns="0" rIns="0" bIns="0" rtlCol="0" anchor="ctr"/>
           <a:lstStyle/>
           <a:p>
-            <a:pPr algn="ctr" indent="0" marL="0">
+            <a:pPr indent="0" marL="0">
               <a:buNone/>
             </a:pPr>
             <a:r>
-              <a:rPr lang="en-US" sz="800" spc="100" kern="0" dirty="0">
+              <a:rPr lang="en-US" sz="950" b="1" spc="80" kern="0" dirty="0">
                 <a:solidFill>
-                  <a:srgbClr val="2A6289"/>
+                  <a:srgbClr val="1A1A1A"/>
                 </a:solidFill>
-                <a:latin typeface="Courier New" pitchFamily="34" charset="0"/>
-                <a:ea typeface="Courier New" pitchFamily="34" charset="-122"/>
-                <a:cs typeface="Courier New" pitchFamily="34" charset="-120"/>
+                <a:latin typeface="Arial" pitchFamily="34" charset="0"/>
+                <a:ea typeface="Arial" pitchFamily="34" charset="-122"/>
+                <a:cs typeface="Arial" pitchFamily="34" charset="-120"/>
               </a:rPr>
-              <a:t>KAREKOD</a:t>
-            </a:r>
-            <a:endParaRPr lang="en-US" sz="800" dirty="0"/>
-          </a:p>
-        </p:txBody>
-      </p:sp>
-      <p:sp>
-        <p:nvSpPr>
-          <p:cNvPr id="7" name="Shape 5"/>
+              <a:t>SÖZLER</a:t>
+            </a:r>
+            <a:endParaRPr lang="en-US" sz="950" dirty="0"/>
+          </a:p>
+        </p:txBody>
+      </p:sp>
+      <p:sp>
+        <p:nvSpPr>
+          <p:cNvPr id="8" name="Shape 6"/>
           <p:cNvSpPr/>
           <p:nvPr/>
         </p:nvSpPr>
         <p:spPr>
           <a:xfrm>
-            <a:off x="8997696" y="969264"/>
-            <a:ext cx="786384" cy="786384"/>
-          </a:xfrm>
-          <a:prstGeom prst="rect">
-            <a:avLst/>
-          </a:prstGeom>
-          <a:solidFill>
-            <a:srgbClr val="FFFFFF"/>
-          </a:solidFill>
+            <a:off x="3995928" y="1280160"/>
+            <a:ext cx="1868424" cy="713232"/>
+          </a:xfrm>
+          <a:prstGeom prst="rect">
+            <a:avLst/>
+          </a:prstGeom>
           <a:ln w="12700">
             <a:solidFill>
-              <a:srgbClr val="6B747C"/>
-            </a:solidFill>
-            <a:prstDash val="dash"/>
-          </a:ln>
-        </p:spPr>
-      </p:sp>
-      <p:sp>
-        <p:nvSpPr>
-          <p:cNvPr id="8" name="Text 6"/>
-          <p:cNvSpPr txBox="1"/>
-          <p:nvPr/>
-        </p:nvSpPr>
-        <p:spPr>
-          <a:xfrm>
-            <a:off x="8778240" y="1792224"/>
-            <a:ext cx="1225296" cy="164592"/>
-          </a:xfrm>
-          <a:prstGeom prst="rect">
-            <a:avLst/>
-          </a:prstGeom>
-          <a:noFill/>
-          <a:ln/>
-        </p:spPr>
-        <p:txBody>
-          <a:bodyPr wrap="square" lIns="0" tIns="0" rIns="0" bIns="0" rtlCol="0" anchor="ctr"/>
-          <a:lstStyle/>
-          <a:p>
-            <a:pPr algn="ctr" indent="0" marL="0">
-              <a:buNone/>
-            </a:pPr>
-            <a:r>
-              <a:rPr lang="en-US" sz="800" i="1" dirty="0">
-                <a:solidFill>
-                  <a:srgbClr val="6B747C"/>
-                </a:solidFill>
-                <a:latin typeface="Calibri" pitchFamily="34" charset="0"/>
-                <a:ea typeface="Calibri" pitchFamily="34" charset="-122"/>
-                <a:cs typeface="Calibri" pitchFamily="34" charset="-120"/>
-              </a:rPr>
-              <a:t>dinlemek için</a:t>
-            </a:r>
-            <a:endParaRPr lang="en-US" sz="800" dirty="0"/>
-          </a:p>
-        </p:txBody>
-      </p:sp>
-      <p:sp>
-        <p:nvSpPr>
-          <p:cNvPr id="9" name="Shape 7"/>
-          <p:cNvSpPr/>
-          <p:nvPr/>
-        </p:nvSpPr>
-        <p:spPr>
-          <a:xfrm>
-            <a:off x="685800" y="1993392"/>
-            <a:ext cx="9317736" cy="621792"/>
-          </a:xfrm>
-          <a:prstGeom prst="rect">
-            <a:avLst/>
-          </a:prstGeom>
-          <a:solidFill>
-            <a:srgbClr val="F4F6F8"/>
-          </a:solidFill>
-          <a:ln w="12700">
-            <a:solidFill>
-              <a:srgbClr val="C9CFD5"/>
+              <a:srgbClr val="1A1A1A"/>
             </a:solidFill>
             <a:prstDash val="solid"/>
           </a:ln>
@@ -2473,14 +1825,14 @@
       </p:sp>
       <p:sp>
         <p:nvSpPr>
-          <p:cNvPr id="10" name="Text 8"/>
+          <p:cNvPr id="9" name="Text 7"/>
           <p:cNvSpPr txBox="1"/>
           <p:nvPr/>
         </p:nvSpPr>
         <p:spPr>
           <a:xfrm>
-            <a:off x="850392" y="2103120"/>
-            <a:ext cx="2843784" cy="182880"/>
+            <a:off x="4123944" y="1389888"/>
+            <a:ext cx="1612392" cy="182880"/>
           </a:xfrm>
           <a:prstGeom prst="rect">
             <a:avLst/>
@@ -2496,38 +1848,37 @@
               <a:buNone/>
             </a:pPr>
             <a:r>
-              <a:rPr lang="en-US" sz="850" spc="100" kern="0" dirty="0">
+              <a:rPr lang="en-US" sz="950" b="1" spc="80" kern="0" dirty="0">
                 <a:solidFill>
-                  <a:srgbClr val="6B747C"/>
+                  <a:srgbClr val="1A1A1A"/>
                 </a:solidFill>
-                <a:latin typeface="Courier New" pitchFamily="34" charset="0"/>
-                <a:ea typeface="Courier New" pitchFamily="34" charset="-122"/>
-                <a:cs typeface="Courier New" pitchFamily="34" charset="-120"/>
+                <a:latin typeface="Arial" pitchFamily="34" charset="0"/>
+                <a:ea typeface="Arial" pitchFamily="34" charset="-122"/>
+                <a:cs typeface="Arial" pitchFamily="34" charset="-120"/>
               </a:rPr>
               <a:t>AD SOYAD</a:t>
             </a:r>
-            <a:endParaRPr lang="en-US" sz="850" dirty="0"/>
-          </a:p>
-        </p:txBody>
-      </p:sp>
-      <p:sp>
-        <p:nvSpPr>
-          <p:cNvPr id="11" name="Shape 9"/>
+            <a:endParaRPr lang="en-US" sz="950" dirty="0"/>
+          </a:p>
+        </p:txBody>
+      </p:sp>
+      <p:sp>
+        <p:nvSpPr>
+          <p:cNvPr id="10" name="Shape 8"/>
           <p:cNvSpPr/>
           <p:nvPr/>
         </p:nvSpPr>
         <p:spPr>
           <a:xfrm>
-            <a:off x="850392" y="2523744"/>
-            <a:ext cx="2843784" cy="0"/>
-          </a:xfrm>
-          <a:prstGeom prst="line">
-            <a:avLst/>
-          </a:prstGeom>
-          <a:noFill/>
-          <a:ln w="11430">
+            <a:off x="6065520" y="1280160"/>
+            <a:ext cx="1868424" cy="713232"/>
+          </a:xfrm>
+          <a:prstGeom prst="rect">
+            <a:avLst/>
+          </a:prstGeom>
+          <a:ln w="12700">
             <a:solidFill>
-              <a:srgbClr val="1B1F24"/>
+              <a:srgbClr val="1A1A1A"/>
             </a:solidFill>
             <a:prstDash val="solid"/>
           </a:ln>
@@ -2535,14 +1886,14 @@
       </p:sp>
       <p:sp>
         <p:nvSpPr>
-          <p:cNvPr id="12" name="Text 10"/>
+          <p:cNvPr id="11" name="Text 9"/>
           <p:cNvSpPr txBox="1"/>
           <p:nvPr/>
         </p:nvSpPr>
         <p:spPr>
           <a:xfrm>
-            <a:off x="3922776" y="2103120"/>
-            <a:ext cx="2843784" cy="182880"/>
+            <a:off x="6193536" y="1389888"/>
+            <a:ext cx="1612392" cy="182880"/>
           </a:xfrm>
           <a:prstGeom prst="rect">
             <a:avLst/>
@@ -2558,38 +1909,37 @@
               <a:buNone/>
             </a:pPr>
             <a:r>
-              <a:rPr lang="en-US" sz="850" spc="100" kern="0" dirty="0">
+              <a:rPr lang="en-US" sz="950" b="1" spc="80" kern="0" dirty="0">
                 <a:solidFill>
-                  <a:srgbClr val="6B747C"/>
+                  <a:srgbClr val="1A1A1A"/>
                 </a:solidFill>
-                <a:latin typeface="Courier New" pitchFamily="34" charset="0"/>
-                <a:ea typeface="Courier New" pitchFamily="34" charset="-122"/>
-                <a:cs typeface="Courier New" pitchFamily="34" charset="-120"/>
+                <a:latin typeface="Arial" pitchFamily="34" charset="0"/>
+                <a:ea typeface="Arial" pitchFamily="34" charset="-122"/>
+                <a:cs typeface="Arial" pitchFamily="34" charset="-120"/>
               </a:rPr>
               <a:t>ÖĞRENCİ NO</a:t>
             </a:r>
-            <a:endParaRPr lang="en-US" sz="850" dirty="0"/>
-          </a:p>
-        </p:txBody>
-      </p:sp>
-      <p:sp>
-        <p:nvSpPr>
-          <p:cNvPr id="13" name="Shape 11"/>
+            <a:endParaRPr lang="en-US" sz="950" dirty="0"/>
+          </a:p>
+        </p:txBody>
+      </p:sp>
+      <p:sp>
+        <p:nvSpPr>
+          <p:cNvPr id="12" name="Shape 10"/>
           <p:cNvSpPr/>
           <p:nvPr/>
         </p:nvSpPr>
         <p:spPr>
           <a:xfrm>
-            <a:off x="3922776" y="2523744"/>
-            <a:ext cx="2843784" cy="0"/>
-          </a:xfrm>
-          <a:prstGeom prst="line">
-            <a:avLst/>
-          </a:prstGeom>
-          <a:noFill/>
-          <a:ln w="11430">
+            <a:off x="8135112" y="1280160"/>
+            <a:ext cx="1868424" cy="713232"/>
+          </a:xfrm>
+          <a:prstGeom prst="rect">
+            <a:avLst/>
+          </a:prstGeom>
+          <a:ln w="12700">
             <a:solidFill>
-              <a:srgbClr val="1B1F24"/>
+              <a:srgbClr val="1A1A1A"/>
             </a:solidFill>
             <a:prstDash val="solid"/>
           </a:ln>
@@ -2597,14 +1947,14 @@
       </p:sp>
       <p:sp>
         <p:nvSpPr>
-          <p:cNvPr id="14" name="Text 12"/>
+          <p:cNvPr id="13" name="Text 11"/>
           <p:cNvSpPr txBox="1"/>
           <p:nvPr/>
         </p:nvSpPr>
         <p:spPr>
           <a:xfrm>
-            <a:off x="6995160" y="2103120"/>
-            <a:ext cx="2843784" cy="182880"/>
+            <a:off x="8263128" y="1389888"/>
+            <a:ext cx="1612392" cy="182880"/>
           </a:xfrm>
           <a:prstGeom prst="rect">
             <a:avLst/>
@@ -2620,38 +1970,37 @@
               <a:buNone/>
             </a:pPr>
             <a:r>
-              <a:rPr lang="en-US" sz="850" spc="100" kern="0" dirty="0">
+              <a:rPr lang="en-US" sz="950" b="1" spc="80" kern="0" dirty="0">
                 <a:solidFill>
-                  <a:srgbClr val="6B747C"/>
+                  <a:srgbClr val="1A1A1A"/>
                 </a:solidFill>
-                <a:latin typeface="Courier New" pitchFamily="34" charset="0"/>
-                <a:ea typeface="Courier New" pitchFamily="34" charset="-122"/>
-                <a:cs typeface="Courier New" pitchFamily="34" charset="-120"/>
+                <a:latin typeface="Arial" pitchFamily="34" charset="0"/>
+                <a:ea typeface="Arial" pitchFamily="34" charset="-122"/>
+                <a:cs typeface="Arial" pitchFamily="34" charset="-120"/>
               </a:rPr>
               <a:t>TARİH</a:t>
             </a:r>
-            <a:endParaRPr lang="en-US" sz="850" dirty="0"/>
-          </a:p>
-        </p:txBody>
-      </p:sp>
-      <p:sp>
-        <p:nvSpPr>
-          <p:cNvPr id="15" name="Shape 13"/>
+            <a:endParaRPr lang="en-US" sz="950" dirty="0"/>
+          </a:p>
+        </p:txBody>
+      </p:sp>
+      <p:sp>
+        <p:nvSpPr>
+          <p:cNvPr id="14" name="Shape 12"/>
           <p:cNvSpPr/>
           <p:nvPr/>
         </p:nvSpPr>
         <p:spPr>
           <a:xfrm>
-            <a:off x="6995160" y="2523744"/>
-            <a:ext cx="2843784" cy="0"/>
-          </a:xfrm>
-          <a:prstGeom prst="line">
-            <a:avLst/>
-          </a:prstGeom>
-          <a:noFill/>
-          <a:ln w="11430">
+            <a:off x="3995928" y="2194560"/>
+            <a:ext cx="2903220" cy="841248"/>
+          </a:xfrm>
+          <a:prstGeom prst="rect">
+            <a:avLst/>
+          </a:prstGeom>
+          <a:ln w="12700">
             <a:solidFill>
-              <a:srgbClr val="1B1F24"/>
+              <a:srgbClr val="1A1A1A"/>
             </a:solidFill>
             <a:prstDash val="solid"/>
           </a:ln>
@@ -2659,22 +2008,60 @@
       </p:sp>
       <p:sp>
         <p:nvSpPr>
+          <p:cNvPr id="15" name="Text 13"/>
+          <p:cNvSpPr txBox="1"/>
+          <p:nvPr/>
+        </p:nvSpPr>
+        <p:spPr>
+          <a:xfrm>
+            <a:off x="4123944" y="2304288"/>
+            <a:ext cx="2647188" cy="182880"/>
+          </a:xfrm>
+          <a:prstGeom prst="rect">
+            <a:avLst/>
+          </a:prstGeom>
+          <a:noFill/>
+          <a:ln/>
+        </p:spPr>
+        <p:txBody>
+          <a:bodyPr wrap="square" lIns="0" tIns="0" rIns="0" bIns="0" rtlCol="0" anchor="ctr"/>
+          <a:lstStyle/>
+          <a:p>
+            <a:pPr indent="0" marL="0">
+              <a:buNone/>
+            </a:pPr>
+            <a:r>
+              <a:rPr lang="en-US" sz="950" b="1" spc="80" kern="0" dirty="0">
+                <a:solidFill>
+                  <a:srgbClr val="1A1A1A"/>
+                </a:solidFill>
+                <a:latin typeface="Arial" pitchFamily="34" charset="0"/>
+                <a:ea typeface="Arial" pitchFamily="34" charset="-122"/>
+                <a:cs typeface="Arial" pitchFamily="34" charset="-120"/>
+              </a:rPr>
+              <a:t>ESER ADI</a:t>
+            </a:r>
+            <a:endParaRPr lang="en-US" sz="950" dirty="0"/>
+          </a:p>
+        </p:txBody>
+      </p:sp>
+      <p:sp>
+        <p:nvSpPr>
           <p:cNvPr id="16" name="Shape 14"/>
           <p:cNvSpPr/>
           <p:nvPr/>
         </p:nvSpPr>
         <p:spPr>
           <a:xfrm>
-            <a:off x="685800" y="2743200"/>
-            <a:ext cx="9317736" cy="0"/>
-          </a:xfrm>
-          <a:prstGeom prst="line">
-            <a:avLst/>
-          </a:prstGeom>
-          <a:noFill/>
-          <a:ln w="20320">
+            <a:off x="7100316" y="2194560"/>
+            <a:ext cx="2903220" cy="841248"/>
+          </a:xfrm>
+          <a:prstGeom prst="rect">
+            <a:avLst/>
+          </a:prstGeom>
+          <a:ln w="12700">
             <a:solidFill>
-              <a:srgbClr val="1B1F24"/>
+              <a:srgbClr val="1A1A1A"/>
             </a:solidFill>
             <a:prstDash val="solid"/>
           </a:ln>
@@ -2682,21 +2069,60 @@
       </p:sp>
       <p:sp>
         <p:nvSpPr>
-          <p:cNvPr id="17" name="Shape 15"/>
+          <p:cNvPr id="17" name="Text 15"/>
+          <p:cNvSpPr txBox="1"/>
+          <p:nvPr/>
+        </p:nvSpPr>
+        <p:spPr>
+          <a:xfrm>
+            <a:off x="7228332" y="2304288"/>
+            <a:ext cx="2647188" cy="182880"/>
+          </a:xfrm>
+          <a:prstGeom prst="rect">
+            <a:avLst/>
+          </a:prstGeom>
+          <a:noFill/>
+          <a:ln/>
+        </p:spPr>
+        <p:txBody>
+          <a:bodyPr wrap="square" lIns="0" tIns="0" rIns="0" bIns="0" rtlCol="0" anchor="ctr"/>
+          <a:lstStyle/>
+          <a:p>
+            <a:pPr indent="0" marL="0">
+              <a:buNone/>
+            </a:pPr>
+            <a:r>
+              <a:rPr lang="en-US" sz="950" b="1" spc="80" kern="0" dirty="0">
+                <a:solidFill>
+                  <a:srgbClr val="1A1A1A"/>
+                </a:solidFill>
+                <a:latin typeface="Arial" pitchFamily="34" charset="0"/>
+                <a:ea typeface="Arial" pitchFamily="34" charset="-122"/>
+                <a:cs typeface="Arial" pitchFamily="34" charset="-120"/>
+              </a:rPr>
+              <a:t>SANATÇI</a:t>
+            </a:r>
+            <a:endParaRPr lang="en-US" sz="950" dirty="0"/>
+          </a:p>
+        </p:txBody>
+      </p:sp>
+      <p:sp>
+        <p:nvSpPr>
+          <p:cNvPr id="18" name="Shape 16"/>
           <p:cNvSpPr/>
           <p:nvPr/>
         </p:nvSpPr>
         <p:spPr>
           <a:xfrm>
-            <a:off x="685800" y="2907792"/>
-            <a:ext cx="4206240" cy="2697480"/>
+            <a:off x="3995928" y="3236976"/>
+            <a:ext cx="6007608" cy="1517904"/>
           </a:xfrm>
           <a:prstGeom prst="rect">
             <a:avLst/>
           </a:prstGeom>
           <a:ln w="12700">
             <a:solidFill>
-              <a:srgbClr val="C9CFD5"/>
+              <a:srgbClr val="1A1A1A"/>
             </a:solidFill>
             <a:prstDash val="solid"/>
           </a:ln>
@@ -2704,14 +2130,14 @@
       </p:sp>
       <p:sp>
         <p:nvSpPr>
-          <p:cNvPr id="18" name="Text 16"/>
+          <p:cNvPr id="19" name="Text 17"/>
           <p:cNvSpPr txBox="1"/>
           <p:nvPr/>
         </p:nvSpPr>
         <p:spPr>
           <a:xfrm>
-            <a:off x="850392" y="3035808"/>
-            <a:ext cx="3877056" cy="201168"/>
+            <a:off x="4123944" y="3346704"/>
+            <a:ext cx="5751576" cy="182880"/>
           </a:xfrm>
           <a:prstGeom prst="rect">
             <a:avLst/>
@@ -2727,15 +2153,15 @@
               <a:buNone/>
             </a:pPr>
             <a:r>
-              <a:rPr lang="en-US" sz="950" spc="120" kern="0" dirty="0">
+              <a:rPr lang="en-US" sz="950" b="1" spc="80" kern="0" dirty="0">
                 <a:solidFill>
-                  <a:srgbClr val="2A6289"/>
+                  <a:srgbClr val="1A1A1A"/>
                 </a:solidFill>
-                <a:latin typeface="Courier New" pitchFamily="34" charset="0"/>
-                <a:ea typeface="Courier New" pitchFamily="34" charset="-122"/>
-                <a:cs typeface="Courier New" pitchFamily="34" charset="-120"/>
+                <a:latin typeface="Arial" pitchFamily="34" charset="0"/>
+                <a:ea typeface="Arial" pitchFamily="34" charset="-122"/>
+                <a:cs typeface="Arial" pitchFamily="34" charset="-120"/>
               </a:rPr>
-              <a:t>ŞARKI</a:t>
+              <a:t>ŞARKININ DUYGULARI</a:t>
             </a:r>
             <a:endParaRPr lang="en-US" sz="950" dirty="0"/>
           </a:p>
@@ -2743,14 +2169,14 @@
       </p:sp>
       <p:sp>
         <p:nvSpPr>
-          <p:cNvPr id="19" name="Text 17"/>
+          <p:cNvPr id="20" name="Text 18"/>
           <p:cNvSpPr txBox="1"/>
           <p:nvPr/>
         </p:nvSpPr>
         <p:spPr>
           <a:xfrm>
-            <a:off x="850392" y="3346704"/>
-            <a:ext cx="3877056" cy="182880"/>
+            <a:off x="685800" y="4956048"/>
+            <a:ext cx="9317736" cy="164592"/>
           </a:xfrm>
           <a:prstGeom prst="rect">
             <a:avLst/>
@@ -2766,38 +2192,37 @@
               <a:buNone/>
             </a:pPr>
             <a:r>
-              <a:rPr lang="en-US" sz="850" spc="100" kern="0" dirty="0">
+              <a:rPr lang="en-US" sz="950" b="1" spc="80" kern="0" dirty="0">
                 <a:solidFill>
-                  <a:srgbClr val="6B747C"/>
+                  <a:srgbClr val="1A1A1A"/>
                 </a:solidFill>
-                <a:latin typeface="Courier New" pitchFamily="34" charset="0"/>
-                <a:ea typeface="Courier New" pitchFamily="34" charset="-122"/>
-                <a:cs typeface="Courier New" pitchFamily="34" charset="-120"/>
+                <a:latin typeface="Arial" pitchFamily="34" charset="0"/>
+                <a:ea typeface="Arial" pitchFamily="34" charset="-122"/>
+                <a:cs typeface="Arial" pitchFamily="34" charset="-120"/>
               </a:rPr>
-              <a:t>ESER ADI</a:t>
-            </a:r>
-            <a:endParaRPr lang="en-US" sz="850" dirty="0"/>
-          </a:p>
-        </p:txBody>
-      </p:sp>
-      <p:sp>
-        <p:nvSpPr>
-          <p:cNvPr id="20" name="Shape 18"/>
+              <a:t>ÇİZİM ALANI</a:t>
+            </a:r>
+            <a:endParaRPr lang="en-US" sz="950" dirty="0"/>
+          </a:p>
+        </p:txBody>
+      </p:sp>
+      <p:sp>
+        <p:nvSpPr>
+          <p:cNvPr id="21" name="Shape 19"/>
           <p:cNvSpPr/>
           <p:nvPr/>
         </p:nvSpPr>
         <p:spPr>
           <a:xfrm>
-            <a:off x="850392" y="3767328"/>
-            <a:ext cx="3877056" cy="0"/>
-          </a:xfrm>
-          <a:prstGeom prst="line">
-            <a:avLst/>
-          </a:prstGeom>
-          <a:noFill/>
-          <a:ln w="11430">
+            <a:off x="685800" y="5148072"/>
+            <a:ext cx="9317736" cy="9317736"/>
+          </a:xfrm>
+          <a:prstGeom prst="rect">
+            <a:avLst/>
+          </a:prstGeom>
+          <a:ln w="12700">
             <a:solidFill>
-              <a:srgbClr val="1B1F24"/>
+              <a:srgbClr val="1A1A1A"/>
             </a:solidFill>
             <a:prstDash val="solid"/>
           </a:ln>
@@ -2805,14 +2230,14 @@
       </p:sp>
       <p:sp>
         <p:nvSpPr>
-          <p:cNvPr id="21" name="Text 19"/>
+          <p:cNvPr id="22" name="Text 20"/>
           <p:cNvSpPr txBox="1"/>
           <p:nvPr/>
         </p:nvSpPr>
         <p:spPr>
           <a:xfrm>
-            <a:off x="850392" y="3950208"/>
-            <a:ext cx="3877056" cy="182880"/>
+            <a:off x="685800" y="14593824"/>
+            <a:ext cx="9317736" cy="164592"/>
           </a:xfrm>
           <a:prstGeom prst="rect">
             <a:avLst/>
@@ -2828,684 +2253,15 @@
               <a:buNone/>
             </a:pPr>
             <a:r>
-              <a:rPr lang="en-US" sz="850" spc="100" kern="0" dirty="0">
+              <a:rPr lang="en-US" sz="950" i="1" dirty="0">
                 <a:solidFill>
-                  <a:srgbClr val="6B747C"/>
+                  <a:srgbClr val="707070"/>
                 </a:solidFill>
-                <a:latin typeface="Courier New" pitchFamily="34" charset="0"/>
-                <a:ea typeface="Courier New" pitchFamily="34" charset="-122"/>
-                <a:cs typeface="Courier New" pitchFamily="34" charset="-120"/>
+                <a:latin typeface="Arial" pitchFamily="34" charset="0"/>
+                <a:ea typeface="Arial" pitchFamily="34" charset="-122"/>
+                <a:cs typeface="Arial" pitchFamily="34" charset="-120"/>
               </a:rPr>
-              <a:t>SANATÇI</a:t>
-            </a:r>
-            <a:endParaRPr lang="en-US" sz="850" dirty="0"/>
-          </a:p>
-        </p:txBody>
-      </p:sp>
-      <p:sp>
-        <p:nvSpPr>
-          <p:cNvPr id="22" name="Shape 20"/>
-          <p:cNvSpPr/>
-          <p:nvPr/>
-        </p:nvSpPr>
-        <p:spPr>
-          <a:xfrm>
-            <a:off x="850392" y="4370832"/>
-            <a:ext cx="3877056" cy="0"/>
-          </a:xfrm>
-          <a:prstGeom prst="line">
-            <a:avLst/>
-          </a:prstGeom>
-          <a:noFill/>
-          <a:ln w="11430">
-            <a:solidFill>
-              <a:srgbClr val="1B1F24"/>
-            </a:solidFill>
-            <a:prstDash val="solid"/>
-          </a:ln>
-        </p:spPr>
-      </p:sp>
-      <p:sp>
-        <p:nvSpPr>
-          <p:cNvPr id="23" name="Text 21"/>
-          <p:cNvSpPr txBox="1"/>
-          <p:nvPr/>
-        </p:nvSpPr>
-        <p:spPr>
-          <a:xfrm>
-            <a:off x="850392" y="4535424"/>
-            <a:ext cx="3877056" cy="237744"/>
-          </a:xfrm>
-          <a:prstGeom prst="rect">
-            <a:avLst/>
-          </a:prstGeom>
-          <a:noFill/>
-          <a:ln/>
-        </p:spPr>
-        <p:txBody>
-          <a:bodyPr wrap="square" lIns="0" tIns="0" rIns="0" bIns="0" rtlCol="0" anchor="ctr"/>
-          <a:lstStyle/>
-          <a:p>
-            <a:pPr indent="0" marL="0">
-              <a:buNone/>
-            </a:pPr>
-            <a:r>
-              <a:rPr lang="en-US" sz="1050" i="1" dirty="0">
-                <a:solidFill>
-                  <a:srgbClr val="6B747C"/>
-                </a:solidFill>
-                <a:latin typeface="Calibri" pitchFamily="34" charset="0"/>
-                <a:ea typeface="Calibri" pitchFamily="34" charset="-122"/>
-                <a:cs typeface="Calibri" pitchFamily="34" charset="-120"/>
-              </a:rPr>
-              <a:t>Seçtiğiniz bölümün sözleri:</a:t>
-            </a:r>
-            <a:endParaRPr lang="en-US" sz="1050" dirty="0"/>
-          </a:p>
-        </p:txBody>
-      </p:sp>
-      <p:sp>
-        <p:nvSpPr>
-          <p:cNvPr id="24" name="Shape 22"/>
-          <p:cNvSpPr/>
-          <p:nvPr/>
-        </p:nvSpPr>
-        <p:spPr>
-          <a:xfrm>
-            <a:off x="850392" y="4974336"/>
-            <a:ext cx="3877056" cy="0"/>
-          </a:xfrm>
-          <a:prstGeom prst="line">
-            <a:avLst/>
-          </a:prstGeom>
-          <a:noFill/>
-          <a:ln w="9525">
-            <a:solidFill>
-              <a:srgbClr val="E3E7EB"/>
-            </a:solidFill>
-            <a:prstDash val="solid"/>
-          </a:ln>
-        </p:spPr>
-      </p:sp>
-      <p:sp>
-        <p:nvSpPr>
-          <p:cNvPr id="25" name="Shape 23"/>
-          <p:cNvSpPr/>
-          <p:nvPr/>
-        </p:nvSpPr>
-        <p:spPr>
-          <a:xfrm>
-            <a:off x="850392" y="5221224"/>
-            <a:ext cx="3877056" cy="0"/>
-          </a:xfrm>
-          <a:prstGeom prst="line">
-            <a:avLst/>
-          </a:prstGeom>
-          <a:noFill/>
-          <a:ln w="9525">
-            <a:solidFill>
-              <a:srgbClr val="E3E7EB"/>
-            </a:solidFill>
-            <a:prstDash val="solid"/>
-          </a:ln>
-        </p:spPr>
-      </p:sp>
-      <p:sp>
-        <p:nvSpPr>
-          <p:cNvPr id="26" name="Shape 24"/>
-          <p:cNvSpPr/>
-          <p:nvPr/>
-        </p:nvSpPr>
-        <p:spPr>
-          <a:xfrm>
-            <a:off x="850392" y="5468112"/>
-            <a:ext cx="3877056" cy="0"/>
-          </a:xfrm>
-          <a:prstGeom prst="line">
-            <a:avLst/>
-          </a:prstGeom>
-          <a:noFill/>
-          <a:ln w="9525">
-            <a:solidFill>
-              <a:srgbClr val="E3E7EB"/>
-            </a:solidFill>
-            <a:prstDash val="solid"/>
-          </a:ln>
-        </p:spPr>
-      </p:sp>
-      <p:sp>
-        <p:nvSpPr>
-          <p:cNvPr id="27" name="Shape 25"/>
-          <p:cNvSpPr/>
-          <p:nvPr/>
-        </p:nvSpPr>
-        <p:spPr>
-          <a:xfrm>
-            <a:off x="5120640" y="2907792"/>
-            <a:ext cx="4882896" cy="1051560"/>
-          </a:xfrm>
-          <a:prstGeom prst="rect">
-            <a:avLst/>
-          </a:prstGeom>
-          <a:solidFill>
-            <a:srgbClr val="F4F6F8"/>
-          </a:solidFill>
-          <a:ln w="12700">
-            <a:solidFill>
-              <a:srgbClr val="C9CFD5"/>
-            </a:solidFill>
-            <a:prstDash val="solid"/>
-          </a:ln>
-        </p:spPr>
-      </p:sp>
-      <p:sp>
-        <p:nvSpPr>
-          <p:cNvPr id="28" name="Text 26"/>
-          <p:cNvSpPr txBox="1"/>
-          <p:nvPr/>
-        </p:nvSpPr>
-        <p:spPr>
-          <a:xfrm>
-            <a:off x="5285232" y="3035808"/>
-            <a:ext cx="4553712" cy="201168"/>
-          </a:xfrm>
-          <a:prstGeom prst="rect">
-            <a:avLst/>
-          </a:prstGeom>
-          <a:noFill/>
-          <a:ln/>
-        </p:spPr>
-        <p:txBody>
-          <a:bodyPr wrap="square" lIns="0" tIns="0" rIns="0" bIns="0" rtlCol="0" anchor="ctr"/>
-          <a:lstStyle/>
-          <a:p>
-            <a:pPr indent="0" marL="0">
-              <a:buNone/>
-            </a:pPr>
-            <a:r>
-              <a:rPr lang="en-US" sz="950" spc="120" kern="0" dirty="0">
-                <a:solidFill>
-                  <a:srgbClr val="2A6289"/>
-                </a:solidFill>
-                <a:latin typeface="Courier New" pitchFamily="34" charset="0"/>
-                <a:ea typeface="Courier New" pitchFamily="34" charset="-122"/>
-                <a:cs typeface="Courier New" pitchFamily="34" charset="-120"/>
-              </a:rPr>
-              <a:t>HEDEFLEDİĞİM DUYGU</a:t>
-            </a:r>
-            <a:endParaRPr lang="en-US" sz="950" dirty="0"/>
-          </a:p>
-        </p:txBody>
-      </p:sp>
-      <p:sp>
-        <p:nvSpPr>
-          <p:cNvPr id="29" name="Text 27"/>
-          <p:cNvSpPr txBox="1"/>
-          <p:nvPr/>
-        </p:nvSpPr>
-        <p:spPr>
-          <a:xfrm>
-            <a:off x="5285232" y="3310128"/>
-            <a:ext cx="4553712" cy="429768"/>
-          </a:xfrm>
-          <a:prstGeom prst="rect">
-            <a:avLst/>
-          </a:prstGeom>
-          <a:noFill/>
-          <a:ln/>
-        </p:spPr>
-        <p:txBody>
-          <a:bodyPr wrap="square" lIns="0" tIns="0" rIns="0" bIns="0" rtlCol="0" anchor="ctr"/>
-          <a:lstStyle/>
-          <a:p>
-            <a:pPr indent="0" marL="0">
-              <a:lnSpc>
-                <a:spcPts val="1400"/>
-              </a:lnSpc>
-              <a:buNone/>
-            </a:pPr>
-            <a:r>
-              <a:rPr lang="en-US" sz="1050" dirty="0">
-                <a:solidFill>
-                  <a:srgbClr val="1B1F24"/>
-                </a:solidFill>
-                <a:latin typeface="Calibri" pitchFamily="34" charset="0"/>
-                <a:ea typeface="Calibri" pitchFamily="34" charset="-122"/>
-                <a:cs typeface="Calibri" pitchFamily="34" charset="-120"/>
-              </a:rPr>
-              <a:t>tedirginlik · dinginlik · öfke · beklenti · yorgunluk · neşe · yalnızlık · panik · ağırlık · hafiflik · kararsızlık · kararlılık</a:t>
-            </a:r>
-            <a:endParaRPr lang="en-US" sz="1050" dirty="0"/>
-          </a:p>
-        </p:txBody>
-      </p:sp>
-      <p:sp>
-        <p:nvSpPr>
-          <p:cNvPr id="30" name="Text 28"/>
-          <p:cNvSpPr txBox="1"/>
-          <p:nvPr/>
-        </p:nvSpPr>
-        <p:spPr>
-          <a:xfrm>
-            <a:off x="5285232" y="3739896"/>
-            <a:ext cx="4553712" cy="182880"/>
-          </a:xfrm>
-          <a:prstGeom prst="rect">
-            <a:avLst/>
-          </a:prstGeom>
-          <a:noFill/>
-          <a:ln/>
-        </p:spPr>
-        <p:txBody>
-          <a:bodyPr wrap="square" lIns="0" tIns="0" rIns="0" bIns="0" rtlCol="0" anchor="ctr"/>
-          <a:lstStyle/>
-          <a:p>
-            <a:pPr indent="0" marL="0">
-              <a:buNone/>
-            </a:pPr>
-            <a:r>
-              <a:rPr lang="en-US" sz="900" i="1" dirty="0">
-                <a:solidFill>
-                  <a:srgbClr val="6B747C"/>
-                </a:solidFill>
-                <a:latin typeface="Calibri" pitchFamily="34" charset="0"/>
-                <a:ea typeface="Calibri" pitchFamily="34" charset="-122"/>
-                <a:cs typeface="Calibri" pitchFamily="34" charset="-120"/>
-              </a:rPr>
-              <a:t>birini daire içine alın</a:t>
-            </a:r>
-            <a:endParaRPr lang="en-US" sz="900" dirty="0"/>
-          </a:p>
-        </p:txBody>
-      </p:sp>
-      <p:sp>
-        <p:nvSpPr>
-          <p:cNvPr id="31" name="Shape 29"/>
-          <p:cNvSpPr/>
-          <p:nvPr/>
-        </p:nvSpPr>
-        <p:spPr>
-          <a:xfrm>
-            <a:off x="5120640" y="4096512"/>
-            <a:ext cx="4882896" cy="1508760"/>
-          </a:xfrm>
-          <a:prstGeom prst="rect">
-            <a:avLst/>
-          </a:prstGeom>
-          <a:ln w="12700">
-            <a:solidFill>
-              <a:srgbClr val="C9CFD5"/>
-            </a:solidFill>
-            <a:prstDash val="solid"/>
-          </a:ln>
-        </p:spPr>
-      </p:sp>
-      <p:sp>
-        <p:nvSpPr>
-          <p:cNvPr id="32" name="Text 30"/>
-          <p:cNvSpPr txBox="1"/>
-          <p:nvPr/>
-        </p:nvSpPr>
-        <p:spPr>
-          <a:xfrm>
-            <a:off x="5285232" y="4224528"/>
-            <a:ext cx="4553712" cy="201168"/>
-          </a:xfrm>
-          <a:prstGeom prst="rect">
-            <a:avLst/>
-          </a:prstGeom>
-          <a:noFill/>
-          <a:ln/>
-        </p:spPr>
-        <p:txBody>
-          <a:bodyPr wrap="square" lIns="0" tIns="0" rIns="0" bIns="0" rtlCol="0" anchor="ctr"/>
-          <a:lstStyle/>
-          <a:p>
-            <a:pPr indent="0" marL="0">
-              <a:buNone/>
-            </a:pPr>
-            <a:r>
-              <a:rPr lang="en-US" sz="950" spc="120" kern="0" dirty="0">
-                <a:solidFill>
-                  <a:srgbClr val="2A6289"/>
-                </a:solidFill>
-                <a:latin typeface="Courier New" pitchFamily="34" charset="0"/>
-                <a:ea typeface="Courier New" pitchFamily="34" charset="-122"/>
-                <a:cs typeface="Courier New" pitchFamily="34" charset="-120"/>
-              </a:rPr>
-              <a:t>NEDEN BU ÇİZGİ?</a:t>
-            </a:r>
-            <a:endParaRPr lang="en-US" sz="950" dirty="0"/>
-          </a:p>
-        </p:txBody>
-      </p:sp>
-      <p:sp>
-        <p:nvSpPr>
-          <p:cNvPr id="33" name="Text 31"/>
-          <p:cNvSpPr txBox="1"/>
-          <p:nvPr/>
-        </p:nvSpPr>
-        <p:spPr>
-          <a:xfrm>
-            <a:off x="5285232" y="4480560"/>
-            <a:ext cx="4553712" cy="237744"/>
-          </a:xfrm>
-          <a:prstGeom prst="rect">
-            <a:avLst/>
-          </a:prstGeom>
-          <a:noFill/>
-          <a:ln/>
-        </p:spPr>
-        <p:txBody>
-          <a:bodyPr wrap="square" lIns="0" tIns="0" rIns="0" bIns="0" rtlCol="0" anchor="ctr"/>
-          <a:lstStyle/>
-          <a:p>
-            <a:pPr indent="0" marL="0">
-              <a:buNone/>
-            </a:pPr>
-            <a:r>
-              <a:rPr lang="en-US" sz="1050" i="1" dirty="0">
-                <a:solidFill>
-                  <a:srgbClr val="6B747C"/>
-                </a:solidFill>
-                <a:latin typeface="Calibri" pitchFamily="34" charset="0"/>
-                <a:ea typeface="Calibri" pitchFamily="34" charset="-122"/>
-                <a:cs typeface="Calibri" pitchFamily="34" charset="-120"/>
-              </a:rPr>
-              <a:t>Bu şarkı için neden bu çizgiyi seçtiniz?</a:t>
-            </a:r>
-            <a:endParaRPr lang="en-US" sz="1050" dirty="0"/>
-          </a:p>
-        </p:txBody>
-      </p:sp>
-      <p:sp>
-        <p:nvSpPr>
-          <p:cNvPr id="34" name="Shape 32"/>
-          <p:cNvSpPr/>
-          <p:nvPr/>
-        </p:nvSpPr>
-        <p:spPr>
-          <a:xfrm>
-            <a:off x="5285232" y="4965192"/>
-            <a:ext cx="4553712" cy="0"/>
-          </a:xfrm>
-          <a:prstGeom prst="line">
-            <a:avLst/>
-          </a:prstGeom>
-          <a:noFill/>
-          <a:ln w="9525">
-            <a:solidFill>
-              <a:srgbClr val="E3E7EB"/>
-            </a:solidFill>
-            <a:prstDash val="solid"/>
-          </a:ln>
-        </p:spPr>
-      </p:sp>
-      <p:sp>
-        <p:nvSpPr>
-          <p:cNvPr id="35" name="Shape 33"/>
-          <p:cNvSpPr/>
-          <p:nvPr/>
-        </p:nvSpPr>
-        <p:spPr>
-          <a:xfrm>
-            <a:off x="5285232" y="5212080"/>
-            <a:ext cx="4553712" cy="0"/>
-          </a:xfrm>
-          <a:prstGeom prst="line">
-            <a:avLst/>
-          </a:prstGeom>
-          <a:noFill/>
-          <a:ln w="9525">
-            <a:solidFill>
-              <a:srgbClr val="E3E7EB"/>
-            </a:solidFill>
-            <a:prstDash val="solid"/>
-          </a:ln>
-        </p:spPr>
-      </p:sp>
-      <p:sp>
-        <p:nvSpPr>
-          <p:cNvPr id="36" name="Shape 34"/>
-          <p:cNvSpPr/>
-          <p:nvPr/>
-        </p:nvSpPr>
-        <p:spPr>
-          <a:xfrm>
-            <a:off x="5285232" y="5458968"/>
-            <a:ext cx="4553712" cy="0"/>
-          </a:xfrm>
-          <a:prstGeom prst="line">
-            <a:avLst/>
-          </a:prstGeom>
-          <a:noFill/>
-          <a:ln w="9525">
-            <a:solidFill>
-              <a:srgbClr val="E3E7EB"/>
-            </a:solidFill>
-            <a:prstDash val="solid"/>
-          </a:ln>
-        </p:spPr>
-      </p:sp>
-      <p:sp>
-        <p:nvSpPr>
-          <p:cNvPr id="37" name="Shape 35"/>
-          <p:cNvSpPr/>
-          <p:nvPr/>
-        </p:nvSpPr>
-        <p:spPr>
-          <a:xfrm>
-            <a:off x="5285232" y="5705856"/>
-            <a:ext cx="4553712" cy="0"/>
-          </a:xfrm>
-          <a:prstGeom prst="line">
-            <a:avLst/>
-          </a:prstGeom>
-          <a:noFill/>
-          <a:ln w="9525">
-            <a:solidFill>
-              <a:srgbClr val="E3E7EB"/>
-            </a:solidFill>
-            <a:prstDash val="solid"/>
-          </a:ln>
-        </p:spPr>
-      </p:sp>
-      <p:sp>
-        <p:nvSpPr>
-          <p:cNvPr id="38" name="Shape 36"/>
-          <p:cNvSpPr/>
-          <p:nvPr/>
-        </p:nvSpPr>
-        <p:spPr>
-          <a:xfrm>
-            <a:off x="1184148" y="6016752"/>
-            <a:ext cx="8321040" cy="8321040"/>
-          </a:xfrm>
-          <a:prstGeom prst="rect">
-            <a:avLst/>
-          </a:prstGeom>
-          <a:ln w="20320">
-            <a:solidFill>
-              <a:srgbClr val="1B1F24"/>
-            </a:solidFill>
-            <a:prstDash val="solid"/>
-          </a:ln>
-        </p:spPr>
-      </p:sp>
-      <p:sp>
-        <p:nvSpPr>
-          <p:cNvPr id="39" name="Text 37"/>
-          <p:cNvSpPr txBox="1"/>
-          <p:nvPr/>
-        </p:nvSpPr>
-        <p:spPr>
-          <a:xfrm>
-            <a:off x="1184148" y="5760720"/>
-            <a:ext cx="2743200" cy="201168"/>
-          </a:xfrm>
-          <a:prstGeom prst="rect">
-            <a:avLst/>
-          </a:prstGeom>
-          <a:noFill/>
-          <a:ln/>
-        </p:spPr>
-        <p:txBody>
-          <a:bodyPr wrap="square" lIns="0" tIns="0" rIns="0" bIns="0" rtlCol="0" anchor="ctr"/>
-          <a:lstStyle/>
-          <a:p>
-            <a:pPr indent="0" marL="0">
-              <a:buNone/>
-            </a:pPr>
-            <a:r>
-              <a:rPr lang="en-US" sz="950" spc="120" kern="0" dirty="0">
-                <a:solidFill>
-                  <a:srgbClr val="2A6289"/>
-                </a:solidFill>
-                <a:latin typeface="Courier New" pitchFamily="34" charset="0"/>
-                <a:ea typeface="Courier New" pitchFamily="34" charset="-122"/>
-                <a:cs typeface="Courier New" pitchFamily="34" charset="-120"/>
-              </a:rPr>
-              <a:t>ÇİZİM ALANI</a:t>
-            </a:r>
-            <a:endParaRPr lang="en-US" sz="950" dirty="0"/>
-          </a:p>
-        </p:txBody>
-      </p:sp>
-      <p:sp>
-        <p:nvSpPr>
-          <p:cNvPr id="40" name="Text 38"/>
-          <p:cNvSpPr txBox="1"/>
-          <p:nvPr/>
-        </p:nvSpPr>
-        <p:spPr>
-          <a:xfrm>
-            <a:off x="6761988" y="5760720"/>
-            <a:ext cx="2743200" cy="201168"/>
-          </a:xfrm>
-          <a:prstGeom prst="rect">
-            <a:avLst/>
-          </a:prstGeom>
-          <a:noFill/>
-          <a:ln/>
-        </p:spPr>
-        <p:txBody>
-          <a:bodyPr wrap="square" lIns="0" tIns="0" rIns="0" bIns="0" rtlCol="0" anchor="ctr"/>
-          <a:lstStyle/>
-          <a:p>
-            <a:pPr algn="r" indent="0" marL="0">
-              <a:buNone/>
-            </a:pPr>
-            <a:r>
-              <a:rPr lang="en-US" sz="950" dirty="0">
-                <a:solidFill>
-                  <a:srgbClr val="6B747C"/>
-                </a:solidFill>
-                <a:latin typeface="Courier New" pitchFamily="34" charset="0"/>
-                <a:ea typeface="Courier New" pitchFamily="34" charset="-122"/>
-                <a:cs typeface="Courier New" pitchFamily="34" charset="-120"/>
-              </a:rPr>
-              <a:t>23 × 23 cm  ·  taşmayın</a:t>
-            </a:r>
-            <a:endParaRPr lang="en-US" sz="950" dirty="0"/>
-          </a:p>
-        </p:txBody>
-      </p:sp>
-      <p:sp>
-        <p:nvSpPr>
-          <p:cNvPr id="41" name="Shape 39"/>
-          <p:cNvSpPr/>
-          <p:nvPr/>
-        </p:nvSpPr>
-        <p:spPr>
-          <a:xfrm>
-            <a:off x="685800" y="14557248"/>
-            <a:ext cx="9317736" cy="0"/>
-          </a:xfrm>
-          <a:prstGeom prst="line">
-            <a:avLst/>
-          </a:prstGeom>
-          <a:noFill/>
-          <a:ln w="15240">
-            <a:solidFill>
-              <a:srgbClr val="1B1F24"/>
-            </a:solidFill>
-            <a:prstDash val="solid"/>
-          </a:ln>
-        </p:spPr>
-      </p:sp>
-      <p:sp>
-        <p:nvSpPr>
-          <p:cNvPr id="42" name="Text 40"/>
-          <p:cNvSpPr txBox="1"/>
-          <p:nvPr/>
-        </p:nvSpPr>
-        <p:spPr>
-          <a:xfrm>
-            <a:off x="685800" y="14685264"/>
-            <a:ext cx="6858000" cy="237744"/>
-          </a:xfrm>
-          <a:prstGeom prst="rect">
-            <a:avLst/>
-          </a:prstGeom>
-          <a:noFill/>
-          <a:ln/>
-        </p:spPr>
-        <p:txBody>
-          <a:bodyPr wrap="square" lIns="0" tIns="0" rIns="0" bIns="0" rtlCol="0" anchor="ctr"/>
-          <a:lstStyle/>
-          <a:p>
-            <a:pPr indent="0" marL="0">
-              <a:buNone/>
-            </a:pPr>
-            <a:r>
-              <a:rPr lang="en-US" sz="1050" dirty="0">
-                <a:solidFill>
-                  <a:srgbClr val="1B1F24"/>
-                </a:solidFill>
-                <a:latin typeface="Calibri" pitchFamily="34" charset="0"/>
-                <a:ea typeface="Calibri" pitchFamily="34" charset="-122"/>
-                <a:cs typeface="Calibri" pitchFamily="34" charset="-120"/>
-              </a:rPr>
-              <a:t>Çalışmanızı bu kareye yerleştirin ya da doğrudan içine çizin.  ·  Yalnızca çizgi: yazı, sembol ve figür kullanılmaz.</a:t>
-            </a:r>
-            <a:endParaRPr lang="en-US" sz="1050" dirty="0"/>
-          </a:p>
-        </p:txBody>
-      </p:sp>
-      <p:sp>
-        <p:nvSpPr>
-          <p:cNvPr id="43" name="Text 41"/>
-          <p:cNvSpPr txBox="1"/>
-          <p:nvPr/>
-        </p:nvSpPr>
-        <p:spPr>
-          <a:xfrm>
-            <a:off x="7543800" y="14685264"/>
-            <a:ext cx="2459736" cy="237744"/>
-          </a:xfrm>
-          <a:prstGeom prst="rect">
-            <a:avLst/>
-          </a:prstGeom>
-          <a:noFill/>
-          <a:ln/>
-        </p:spPr>
-        <p:txBody>
-          <a:bodyPr wrap="square" lIns="0" tIns="0" rIns="0" bIns="0" rtlCol="0" anchor="ctr"/>
-          <a:lstStyle/>
-          <a:p>
-            <a:pPr algn="r" indent="0" marL="0">
-              <a:buNone/>
-            </a:pPr>
-            <a:r>
-              <a:rPr lang="en-US" sz="950" spc="120" kern="0" dirty="0">
-                <a:solidFill>
-                  <a:srgbClr val="2A6289"/>
-                </a:solidFill>
-                <a:latin typeface="Courier New" pitchFamily="34" charset="0"/>
-                <a:ea typeface="Courier New" pitchFamily="34" charset="-122"/>
-                <a:cs typeface="Courier New" pitchFamily="34" charset="-120"/>
-              </a:rPr>
-              <a:t>KAPADOKYA ÜNİVERSİTESİ</a:t>
+              <a:t>Yalnızca çizgi: yazı, sembol ve figür kullanılmaz.</a:t>
             </a:r>
             <a:endParaRPr lang="en-US" sz="950" dirty="0"/>
           </a:p>

--- a/ders/serbest-cizim-teknikleri/08-cizgilerle-siir-sarki-pafta-A3.pptx
+++ b/ders/serbest-cizim-teknikleri/08-cizgilerle-siir-sarki-pafta-A3.pptx
@@ -11,8 +11,8 @@
   <p:notesMasterIdLst>
     <p:notesMasterId r:id="rId4"/>
   </p:notesMasterIdLst>
-  <p:sldSz cx="10689336" cy="15124176"/>
-  <p:notesSz cx="15124176" cy="10689336"/>
+  <p:sldSz cx="15124176" cy="10689336"/>
+  <p:notesSz cx="10689336" cy="15124176"/>
   <p:defaultTextStyle>
     <a:lvl1pPr marL="0" algn="l" defTabSz="914400" rtl="0" eaLnBrk="1" latinLnBrk="0" hangingPunct="1">
       <a:defRPr sz="1800" kern="1200">
@@ -972,8 +972,8 @@
         </p:nvSpPr>
         <p:spPr>
           <a:xfrm>
-            <a:off x="685800" y="530352"/>
-            <a:ext cx="9317736" cy="164592"/>
+            <a:off x="640080" y="502920"/>
+            <a:ext cx="13844016" cy="164592"/>
           </a:xfrm>
           <a:prstGeom prst="rect">
             <a:avLst/>
@@ -1011,8 +1011,8 @@
         </p:nvSpPr>
         <p:spPr>
           <a:xfrm>
-            <a:off x="685800" y="749808"/>
-            <a:ext cx="9317736" cy="365760"/>
+            <a:off x="640080" y="722376"/>
+            <a:ext cx="13844016" cy="365760"/>
           </a:xfrm>
           <a:prstGeom prst="rect">
             <a:avLst/>
@@ -1050,8 +1050,8 @@
         </p:nvSpPr>
         <p:spPr>
           <a:xfrm>
-            <a:off x="685800" y="1280160"/>
-            <a:ext cx="3108960" cy="3474720"/>
+            <a:off x="640080" y="1298448"/>
+            <a:ext cx="1554480" cy="713232"/>
           </a:xfrm>
           <a:prstGeom prst="rect">
             <a:avLst/>
@@ -1072,8 +1072,313 @@
         </p:nvSpPr>
         <p:spPr>
           <a:xfrm>
-            <a:off x="813816" y="1389888"/>
-            <a:ext cx="2852928" cy="182880"/>
+            <a:off x="768096" y="1408176"/>
+            <a:ext cx="1298448" cy="182880"/>
+          </a:xfrm>
+          <a:prstGeom prst="rect">
+            <a:avLst/>
+          </a:prstGeom>
+          <a:noFill/>
+          <a:ln/>
+        </p:spPr>
+        <p:txBody>
+          <a:bodyPr wrap="square" lIns="0" tIns="0" rIns="0" bIns="0" rtlCol="0" anchor="ctr"/>
+          <a:lstStyle/>
+          <a:p>
+            <a:pPr indent="0" marL="0">
+              <a:buNone/>
+            </a:pPr>
+            <a:r>
+              <a:rPr lang="en-US" sz="950" b="1" spc="80" kern="0" dirty="0">
+                <a:solidFill>
+                  <a:srgbClr val="1A1A1A"/>
+                </a:solidFill>
+                <a:latin typeface="Arial" pitchFamily="34" charset="0"/>
+                <a:ea typeface="Arial" pitchFamily="34" charset="-122"/>
+                <a:cs typeface="Arial" pitchFamily="34" charset="-120"/>
+              </a:rPr>
+              <a:t>AD SOYAD</a:t>
+            </a:r>
+            <a:endParaRPr lang="en-US" sz="950" dirty="0"/>
+          </a:p>
+        </p:txBody>
+      </p:sp>
+      <p:sp>
+        <p:nvSpPr>
+          <p:cNvPr id="6" name="Shape 4"/>
+          <p:cNvSpPr/>
+          <p:nvPr/>
+        </p:nvSpPr>
+        <p:spPr>
+          <a:xfrm>
+            <a:off x="2395728" y="1298448"/>
+            <a:ext cx="1554480" cy="713232"/>
+          </a:xfrm>
+          <a:prstGeom prst="rect">
+            <a:avLst/>
+          </a:prstGeom>
+          <a:ln w="12700">
+            <a:solidFill>
+              <a:srgbClr val="1A1A1A"/>
+            </a:solidFill>
+            <a:prstDash val="solid"/>
+          </a:ln>
+        </p:spPr>
+      </p:sp>
+      <p:sp>
+        <p:nvSpPr>
+          <p:cNvPr id="7" name="Text 5"/>
+          <p:cNvSpPr txBox="1"/>
+          <p:nvPr/>
+        </p:nvSpPr>
+        <p:spPr>
+          <a:xfrm>
+            <a:off x="2523744" y="1408176"/>
+            <a:ext cx="1298448" cy="182880"/>
+          </a:xfrm>
+          <a:prstGeom prst="rect">
+            <a:avLst/>
+          </a:prstGeom>
+          <a:noFill/>
+          <a:ln/>
+        </p:spPr>
+        <p:txBody>
+          <a:bodyPr wrap="square" lIns="0" tIns="0" rIns="0" bIns="0" rtlCol="0" anchor="ctr"/>
+          <a:lstStyle/>
+          <a:p>
+            <a:pPr indent="0" marL="0">
+              <a:buNone/>
+            </a:pPr>
+            <a:r>
+              <a:rPr lang="en-US" sz="950" b="1" spc="80" kern="0" dirty="0">
+                <a:solidFill>
+                  <a:srgbClr val="1A1A1A"/>
+                </a:solidFill>
+                <a:latin typeface="Arial" pitchFamily="34" charset="0"/>
+                <a:ea typeface="Arial" pitchFamily="34" charset="-122"/>
+                <a:cs typeface="Arial" pitchFamily="34" charset="-120"/>
+              </a:rPr>
+              <a:t>ÖĞRENCİ NO</a:t>
+            </a:r>
+            <a:endParaRPr lang="en-US" sz="950" dirty="0"/>
+          </a:p>
+        </p:txBody>
+      </p:sp>
+      <p:sp>
+        <p:nvSpPr>
+          <p:cNvPr id="8" name="Shape 6"/>
+          <p:cNvSpPr/>
+          <p:nvPr/>
+        </p:nvSpPr>
+        <p:spPr>
+          <a:xfrm>
+            <a:off x="4151376" y="1298448"/>
+            <a:ext cx="1554480" cy="713232"/>
+          </a:xfrm>
+          <a:prstGeom prst="rect">
+            <a:avLst/>
+          </a:prstGeom>
+          <a:ln w="12700">
+            <a:solidFill>
+              <a:srgbClr val="1A1A1A"/>
+            </a:solidFill>
+            <a:prstDash val="solid"/>
+          </a:ln>
+        </p:spPr>
+      </p:sp>
+      <p:sp>
+        <p:nvSpPr>
+          <p:cNvPr id="9" name="Text 7"/>
+          <p:cNvSpPr txBox="1"/>
+          <p:nvPr/>
+        </p:nvSpPr>
+        <p:spPr>
+          <a:xfrm>
+            <a:off x="4279392" y="1408176"/>
+            <a:ext cx="1298448" cy="182880"/>
+          </a:xfrm>
+          <a:prstGeom prst="rect">
+            <a:avLst/>
+          </a:prstGeom>
+          <a:noFill/>
+          <a:ln/>
+        </p:spPr>
+        <p:txBody>
+          <a:bodyPr wrap="square" lIns="0" tIns="0" rIns="0" bIns="0" rtlCol="0" anchor="ctr"/>
+          <a:lstStyle/>
+          <a:p>
+            <a:pPr indent="0" marL="0">
+              <a:buNone/>
+            </a:pPr>
+            <a:r>
+              <a:rPr lang="en-US" sz="950" b="1" spc="80" kern="0" dirty="0">
+                <a:solidFill>
+                  <a:srgbClr val="1A1A1A"/>
+                </a:solidFill>
+                <a:latin typeface="Arial" pitchFamily="34" charset="0"/>
+                <a:ea typeface="Arial" pitchFamily="34" charset="-122"/>
+                <a:cs typeface="Arial" pitchFamily="34" charset="-120"/>
+              </a:rPr>
+              <a:t>TARİH</a:t>
+            </a:r>
+            <a:endParaRPr lang="en-US" sz="950" dirty="0"/>
+          </a:p>
+        </p:txBody>
+      </p:sp>
+      <p:sp>
+        <p:nvSpPr>
+          <p:cNvPr id="10" name="Shape 8"/>
+          <p:cNvSpPr/>
+          <p:nvPr/>
+        </p:nvSpPr>
+        <p:spPr>
+          <a:xfrm>
+            <a:off x="640080" y="2212848"/>
+            <a:ext cx="2432304" cy="841248"/>
+          </a:xfrm>
+          <a:prstGeom prst="rect">
+            <a:avLst/>
+          </a:prstGeom>
+          <a:ln w="12700">
+            <a:solidFill>
+              <a:srgbClr val="1A1A1A"/>
+            </a:solidFill>
+            <a:prstDash val="solid"/>
+          </a:ln>
+        </p:spPr>
+      </p:sp>
+      <p:sp>
+        <p:nvSpPr>
+          <p:cNvPr id="11" name="Text 9"/>
+          <p:cNvSpPr txBox="1"/>
+          <p:nvPr/>
+        </p:nvSpPr>
+        <p:spPr>
+          <a:xfrm>
+            <a:off x="768096" y="2322576"/>
+            <a:ext cx="2176272" cy="182880"/>
+          </a:xfrm>
+          <a:prstGeom prst="rect">
+            <a:avLst/>
+          </a:prstGeom>
+          <a:noFill/>
+          <a:ln/>
+        </p:spPr>
+        <p:txBody>
+          <a:bodyPr wrap="square" lIns="0" tIns="0" rIns="0" bIns="0" rtlCol="0" anchor="ctr"/>
+          <a:lstStyle/>
+          <a:p>
+            <a:pPr indent="0" marL="0">
+              <a:buNone/>
+            </a:pPr>
+            <a:r>
+              <a:rPr lang="en-US" sz="950" b="1" spc="80" kern="0" dirty="0">
+                <a:solidFill>
+                  <a:srgbClr val="1A1A1A"/>
+                </a:solidFill>
+                <a:latin typeface="Arial" pitchFamily="34" charset="0"/>
+                <a:ea typeface="Arial" pitchFamily="34" charset="-122"/>
+                <a:cs typeface="Arial" pitchFamily="34" charset="-120"/>
+              </a:rPr>
+              <a:t>ŞİİRİN ADI</a:t>
+            </a:r>
+            <a:endParaRPr lang="en-US" sz="950" dirty="0"/>
+          </a:p>
+        </p:txBody>
+      </p:sp>
+      <p:sp>
+        <p:nvSpPr>
+          <p:cNvPr id="12" name="Shape 10"/>
+          <p:cNvSpPr/>
+          <p:nvPr/>
+        </p:nvSpPr>
+        <p:spPr>
+          <a:xfrm>
+            <a:off x="3273552" y="2212848"/>
+            <a:ext cx="2432304" cy="841248"/>
+          </a:xfrm>
+          <a:prstGeom prst="rect">
+            <a:avLst/>
+          </a:prstGeom>
+          <a:ln w="12700">
+            <a:solidFill>
+              <a:srgbClr val="1A1A1A"/>
+            </a:solidFill>
+            <a:prstDash val="solid"/>
+          </a:ln>
+        </p:spPr>
+      </p:sp>
+      <p:sp>
+        <p:nvSpPr>
+          <p:cNvPr id="13" name="Text 11"/>
+          <p:cNvSpPr txBox="1"/>
+          <p:nvPr/>
+        </p:nvSpPr>
+        <p:spPr>
+          <a:xfrm>
+            <a:off x="3401568" y="2322576"/>
+            <a:ext cx="2176272" cy="182880"/>
+          </a:xfrm>
+          <a:prstGeom prst="rect">
+            <a:avLst/>
+          </a:prstGeom>
+          <a:noFill/>
+          <a:ln/>
+        </p:spPr>
+        <p:txBody>
+          <a:bodyPr wrap="square" lIns="0" tIns="0" rIns="0" bIns="0" rtlCol="0" anchor="ctr"/>
+          <a:lstStyle/>
+          <a:p>
+            <a:pPr indent="0" marL="0">
+              <a:buNone/>
+            </a:pPr>
+            <a:r>
+              <a:rPr lang="en-US" sz="950" b="1" spc="80" kern="0" dirty="0">
+                <a:solidFill>
+                  <a:srgbClr val="1A1A1A"/>
+                </a:solidFill>
+                <a:latin typeface="Arial" pitchFamily="34" charset="0"/>
+                <a:ea typeface="Arial" pitchFamily="34" charset="-122"/>
+                <a:cs typeface="Arial" pitchFamily="34" charset="-120"/>
+              </a:rPr>
+              <a:t>ŞAİR</a:t>
+            </a:r>
+            <a:endParaRPr lang="en-US" sz="950" dirty="0"/>
+          </a:p>
+        </p:txBody>
+      </p:sp>
+      <p:sp>
+        <p:nvSpPr>
+          <p:cNvPr id="14" name="Shape 12"/>
+          <p:cNvSpPr/>
+          <p:nvPr/>
+        </p:nvSpPr>
+        <p:spPr>
+          <a:xfrm>
+            <a:off x="640080" y="3255264"/>
+            <a:ext cx="5065776" cy="4526280"/>
+          </a:xfrm>
+          <a:prstGeom prst="rect">
+            <a:avLst/>
+          </a:prstGeom>
+          <a:ln w="12700">
+            <a:solidFill>
+              <a:srgbClr val="1A1A1A"/>
+            </a:solidFill>
+            <a:prstDash val="solid"/>
+          </a:ln>
+        </p:spPr>
+      </p:sp>
+      <p:sp>
+        <p:nvSpPr>
+          <p:cNvPr id="15" name="Text 13"/>
+          <p:cNvSpPr txBox="1"/>
+          <p:nvPr/>
+        </p:nvSpPr>
+        <p:spPr>
+          <a:xfrm>
+            <a:off x="768096" y="3364992"/>
+            <a:ext cx="4809744" cy="182880"/>
           </a:xfrm>
           <a:prstGeom prst="rect">
             <a:avLst/>
@@ -1105,14 +1410,14 @@
       </p:sp>
       <p:sp>
         <p:nvSpPr>
-          <p:cNvPr id="6" name="Shape 4"/>
+          <p:cNvPr id="16" name="Shape 14"/>
           <p:cNvSpPr/>
           <p:nvPr/>
         </p:nvSpPr>
         <p:spPr>
           <a:xfrm>
-            <a:off x="3995928" y="1280160"/>
-            <a:ext cx="1868424" cy="713232"/>
+            <a:off x="640080" y="7982712"/>
+            <a:ext cx="5065776" cy="1892808"/>
           </a:xfrm>
           <a:prstGeom prst="rect">
             <a:avLst/>
@@ -1127,319 +1432,14 @@
       </p:sp>
       <p:sp>
         <p:nvSpPr>
-          <p:cNvPr id="7" name="Text 5"/>
-          <p:cNvSpPr txBox="1"/>
-          <p:nvPr/>
-        </p:nvSpPr>
-        <p:spPr>
-          <a:xfrm>
-            <a:off x="4123944" y="1389888"/>
-            <a:ext cx="1612392" cy="182880"/>
-          </a:xfrm>
-          <a:prstGeom prst="rect">
-            <a:avLst/>
-          </a:prstGeom>
-          <a:noFill/>
-          <a:ln/>
-        </p:spPr>
-        <p:txBody>
-          <a:bodyPr wrap="square" lIns="0" tIns="0" rIns="0" bIns="0" rtlCol="0" anchor="ctr"/>
-          <a:lstStyle/>
-          <a:p>
-            <a:pPr indent="0" marL="0">
-              <a:buNone/>
-            </a:pPr>
-            <a:r>
-              <a:rPr lang="en-US" sz="950" b="1" spc="80" kern="0" dirty="0">
-                <a:solidFill>
-                  <a:srgbClr val="1A1A1A"/>
-                </a:solidFill>
-                <a:latin typeface="Arial" pitchFamily="34" charset="0"/>
-                <a:ea typeface="Arial" pitchFamily="34" charset="-122"/>
-                <a:cs typeface="Arial" pitchFamily="34" charset="-120"/>
-              </a:rPr>
-              <a:t>AD SOYAD</a:t>
-            </a:r>
-            <a:endParaRPr lang="en-US" sz="950" dirty="0"/>
-          </a:p>
-        </p:txBody>
-      </p:sp>
-      <p:sp>
-        <p:nvSpPr>
-          <p:cNvPr id="8" name="Shape 6"/>
-          <p:cNvSpPr/>
-          <p:nvPr/>
-        </p:nvSpPr>
-        <p:spPr>
-          <a:xfrm>
-            <a:off x="6065520" y="1280160"/>
-            <a:ext cx="1868424" cy="713232"/>
-          </a:xfrm>
-          <a:prstGeom prst="rect">
-            <a:avLst/>
-          </a:prstGeom>
-          <a:ln w="12700">
-            <a:solidFill>
-              <a:srgbClr val="1A1A1A"/>
-            </a:solidFill>
-            <a:prstDash val="solid"/>
-          </a:ln>
-        </p:spPr>
-      </p:sp>
-      <p:sp>
-        <p:nvSpPr>
-          <p:cNvPr id="9" name="Text 7"/>
-          <p:cNvSpPr txBox="1"/>
-          <p:nvPr/>
-        </p:nvSpPr>
-        <p:spPr>
-          <a:xfrm>
-            <a:off x="6193536" y="1389888"/>
-            <a:ext cx="1612392" cy="182880"/>
-          </a:xfrm>
-          <a:prstGeom prst="rect">
-            <a:avLst/>
-          </a:prstGeom>
-          <a:noFill/>
-          <a:ln/>
-        </p:spPr>
-        <p:txBody>
-          <a:bodyPr wrap="square" lIns="0" tIns="0" rIns="0" bIns="0" rtlCol="0" anchor="ctr"/>
-          <a:lstStyle/>
-          <a:p>
-            <a:pPr indent="0" marL="0">
-              <a:buNone/>
-            </a:pPr>
-            <a:r>
-              <a:rPr lang="en-US" sz="950" b="1" spc="80" kern="0" dirty="0">
-                <a:solidFill>
-                  <a:srgbClr val="1A1A1A"/>
-                </a:solidFill>
-                <a:latin typeface="Arial" pitchFamily="34" charset="0"/>
-                <a:ea typeface="Arial" pitchFamily="34" charset="-122"/>
-                <a:cs typeface="Arial" pitchFamily="34" charset="-120"/>
-              </a:rPr>
-              <a:t>ÖĞRENCİ NO</a:t>
-            </a:r>
-            <a:endParaRPr lang="en-US" sz="950" dirty="0"/>
-          </a:p>
-        </p:txBody>
-      </p:sp>
-      <p:sp>
-        <p:nvSpPr>
-          <p:cNvPr id="10" name="Shape 8"/>
-          <p:cNvSpPr/>
-          <p:nvPr/>
-        </p:nvSpPr>
-        <p:spPr>
-          <a:xfrm>
-            <a:off x="8135112" y="1280160"/>
-            <a:ext cx="1868424" cy="713232"/>
-          </a:xfrm>
-          <a:prstGeom prst="rect">
-            <a:avLst/>
-          </a:prstGeom>
-          <a:ln w="12700">
-            <a:solidFill>
-              <a:srgbClr val="1A1A1A"/>
-            </a:solidFill>
-            <a:prstDash val="solid"/>
-          </a:ln>
-        </p:spPr>
-      </p:sp>
-      <p:sp>
-        <p:nvSpPr>
-          <p:cNvPr id="11" name="Text 9"/>
-          <p:cNvSpPr txBox="1"/>
-          <p:nvPr/>
-        </p:nvSpPr>
-        <p:spPr>
-          <a:xfrm>
-            <a:off x="8263128" y="1389888"/>
-            <a:ext cx="1612392" cy="182880"/>
-          </a:xfrm>
-          <a:prstGeom prst="rect">
-            <a:avLst/>
-          </a:prstGeom>
-          <a:noFill/>
-          <a:ln/>
-        </p:spPr>
-        <p:txBody>
-          <a:bodyPr wrap="square" lIns="0" tIns="0" rIns="0" bIns="0" rtlCol="0" anchor="ctr"/>
-          <a:lstStyle/>
-          <a:p>
-            <a:pPr indent="0" marL="0">
-              <a:buNone/>
-            </a:pPr>
-            <a:r>
-              <a:rPr lang="en-US" sz="950" b="1" spc="80" kern="0" dirty="0">
-                <a:solidFill>
-                  <a:srgbClr val="1A1A1A"/>
-                </a:solidFill>
-                <a:latin typeface="Arial" pitchFamily="34" charset="0"/>
-                <a:ea typeface="Arial" pitchFamily="34" charset="-122"/>
-                <a:cs typeface="Arial" pitchFamily="34" charset="-120"/>
-              </a:rPr>
-              <a:t>TARİH</a:t>
-            </a:r>
-            <a:endParaRPr lang="en-US" sz="950" dirty="0"/>
-          </a:p>
-        </p:txBody>
-      </p:sp>
-      <p:sp>
-        <p:nvSpPr>
-          <p:cNvPr id="12" name="Shape 10"/>
-          <p:cNvSpPr/>
-          <p:nvPr/>
-        </p:nvSpPr>
-        <p:spPr>
-          <a:xfrm>
-            <a:off x="3995928" y="2194560"/>
-            <a:ext cx="2903220" cy="841248"/>
-          </a:xfrm>
-          <a:prstGeom prst="rect">
-            <a:avLst/>
-          </a:prstGeom>
-          <a:ln w="12700">
-            <a:solidFill>
-              <a:srgbClr val="1A1A1A"/>
-            </a:solidFill>
-            <a:prstDash val="solid"/>
-          </a:ln>
-        </p:spPr>
-      </p:sp>
-      <p:sp>
-        <p:nvSpPr>
-          <p:cNvPr id="13" name="Text 11"/>
-          <p:cNvSpPr txBox="1"/>
-          <p:nvPr/>
-        </p:nvSpPr>
-        <p:spPr>
-          <a:xfrm>
-            <a:off x="4123944" y="2304288"/>
-            <a:ext cx="2647188" cy="182880"/>
-          </a:xfrm>
-          <a:prstGeom prst="rect">
-            <a:avLst/>
-          </a:prstGeom>
-          <a:noFill/>
-          <a:ln/>
-        </p:spPr>
-        <p:txBody>
-          <a:bodyPr wrap="square" lIns="0" tIns="0" rIns="0" bIns="0" rtlCol="0" anchor="ctr"/>
-          <a:lstStyle/>
-          <a:p>
-            <a:pPr indent="0" marL="0">
-              <a:buNone/>
-            </a:pPr>
-            <a:r>
-              <a:rPr lang="en-US" sz="950" b="1" spc="80" kern="0" dirty="0">
-                <a:solidFill>
-                  <a:srgbClr val="1A1A1A"/>
-                </a:solidFill>
-                <a:latin typeface="Arial" pitchFamily="34" charset="0"/>
-                <a:ea typeface="Arial" pitchFamily="34" charset="-122"/>
-                <a:cs typeface="Arial" pitchFamily="34" charset="-120"/>
-              </a:rPr>
-              <a:t>ŞİİRİN ADI</a:t>
-            </a:r>
-            <a:endParaRPr lang="en-US" sz="950" dirty="0"/>
-          </a:p>
-        </p:txBody>
-      </p:sp>
-      <p:sp>
-        <p:nvSpPr>
-          <p:cNvPr id="14" name="Shape 12"/>
-          <p:cNvSpPr/>
-          <p:nvPr/>
-        </p:nvSpPr>
-        <p:spPr>
-          <a:xfrm>
-            <a:off x="7100316" y="2194560"/>
-            <a:ext cx="2903220" cy="841248"/>
-          </a:xfrm>
-          <a:prstGeom prst="rect">
-            <a:avLst/>
-          </a:prstGeom>
-          <a:ln w="12700">
-            <a:solidFill>
-              <a:srgbClr val="1A1A1A"/>
-            </a:solidFill>
-            <a:prstDash val="solid"/>
-          </a:ln>
-        </p:spPr>
-      </p:sp>
-      <p:sp>
-        <p:nvSpPr>
-          <p:cNvPr id="15" name="Text 13"/>
-          <p:cNvSpPr txBox="1"/>
-          <p:nvPr/>
-        </p:nvSpPr>
-        <p:spPr>
-          <a:xfrm>
-            <a:off x="7228332" y="2304288"/>
-            <a:ext cx="2647188" cy="182880"/>
-          </a:xfrm>
-          <a:prstGeom prst="rect">
-            <a:avLst/>
-          </a:prstGeom>
-          <a:noFill/>
-          <a:ln/>
-        </p:spPr>
-        <p:txBody>
-          <a:bodyPr wrap="square" lIns="0" tIns="0" rIns="0" bIns="0" rtlCol="0" anchor="ctr"/>
-          <a:lstStyle/>
-          <a:p>
-            <a:pPr indent="0" marL="0">
-              <a:buNone/>
-            </a:pPr>
-            <a:r>
-              <a:rPr lang="en-US" sz="950" b="1" spc="80" kern="0" dirty="0">
-                <a:solidFill>
-                  <a:srgbClr val="1A1A1A"/>
-                </a:solidFill>
-                <a:latin typeface="Arial" pitchFamily="34" charset="0"/>
-                <a:ea typeface="Arial" pitchFamily="34" charset="-122"/>
-                <a:cs typeface="Arial" pitchFamily="34" charset="-120"/>
-              </a:rPr>
-              <a:t>ŞAİR</a:t>
-            </a:r>
-            <a:endParaRPr lang="en-US" sz="950" dirty="0"/>
-          </a:p>
-        </p:txBody>
-      </p:sp>
-      <p:sp>
-        <p:nvSpPr>
-          <p:cNvPr id="16" name="Shape 14"/>
-          <p:cNvSpPr/>
-          <p:nvPr/>
-        </p:nvSpPr>
-        <p:spPr>
-          <a:xfrm>
-            <a:off x="3995928" y="3236976"/>
-            <a:ext cx="6007608" cy="1517904"/>
-          </a:xfrm>
-          <a:prstGeom prst="rect">
-            <a:avLst/>
-          </a:prstGeom>
-          <a:ln w="12700">
-            <a:solidFill>
-              <a:srgbClr val="1A1A1A"/>
-            </a:solidFill>
-            <a:prstDash val="solid"/>
-          </a:ln>
-        </p:spPr>
-      </p:sp>
-      <p:sp>
-        <p:nvSpPr>
           <p:cNvPr id="17" name="Text 15"/>
           <p:cNvSpPr txBox="1"/>
           <p:nvPr/>
         </p:nvSpPr>
         <p:spPr>
           <a:xfrm>
-            <a:off x="4123944" y="3346704"/>
-            <a:ext cx="5751576" cy="182880"/>
+            <a:off x="768096" y="8092440"/>
+            <a:ext cx="4809744" cy="182880"/>
           </a:xfrm>
           <a:prstGeom prst="rect">
             <a:avLst/>
@@ -1471,14 +1471,36 @@
       </p:sp>
       <p:sp>
         <p:nvSpPr>
-          <p:cNvPr id="18" name="Text 16"/>
+          <p:cNvPr id="18" name="Shape 16"/>
+          <p:cNvSpPr/>
+          <p:nvPr/>
+        </p:nvSpPr>
+        <p:spPr>
+          <a:xfrm>
+            <a:off x="5907024" y="1298448"/>
+            <a:ext cx="8577072" cy="8577072"/>
+          </a:xfrm>
+          <a:prstGeom prst="rect">
+            <a:avLst/>
+          </a:prstGeom>
+          <a:ln w="12700">
+            <a:solidFill>
+              <a:srgbClr val="1A1A1A"/>
+            </a:solidFill>
+            <a:prstDash val="solid"/>
+          </a:ln>
+        </p:spPr>
+      </p:sp>
+      <p:sp>
+        <p:nvSpPr>
+          <p:cNvPr id="19" name="Text 17"/>
           <p:cNvSpPr txBox="1"/>
           <p:nvPr/>
         </p:nvSpPr>
         <p:spPr>
           <a:xfrm>
-            <a:off x="685800" y="4956048"/>
-            <a:ext cx="9317736" cy="164592"/>
+            <a:off x="6035040" y="1408176"/>
+            <a:ext cx="8321040" cy="182880"/>
           </a:xfrm>
           <a:prstGeom prst="rect">
             <a:avLst/>
@@ -1510,36 +1532,14 @@
       </p:sp>
       <p:sp>
         <p:nvSpPr>
-          <p:cNvPr id="19" name="Shape 17"/>
-          <p:cNvSpPr/>
-          <p:nvPr/>
-        </p:nvSpPr>
-        <p:spPr>
-          <a:xfrm>
-            <a:off x="685800" y="5148072"/>
-            <a:ext cx="9317736" cy="9317736"/>
-          </a:xfrm>
-          <a:prstGeom prst="rect">
-            <a:avLst/>
-          </a:prstGeom>
-          <a:ln w="12700">
-            <a:solidFill>
-              <a:srgbClr val="1A1A1A"/>
-            </a:solidFill>
-            <a:prstDash val="solid"/>
-          </a:ln>
-        </p:spPr>
-      </p:sp>
-      <p:sp>
-        <p:nvSpPr>
           <p:cNvPr id="20" name="Text 18"/>
           <p:cNvSpPr txBox="1"/>
           <p:nvPr/>
         </p:nvSpPr>
         <p:spPr>
           <a:xfrm>
-            <a:off x="685800" y="14593824"/>
-            <a:ext cx="9317736" cy="164592"/>
+            <a:off x="640080" y="10021824"/>
+            <a:ext cx="13844016" cy="164592"/>
           </a:xfrm>
           <a:prstGeom prst="rect">
             <a:avLst/>
@@ -1609,8 +1609,8 @@
         </p:nvSpPr>
         <p:spPr>
           <a:xfrm>
-            <a:off x="685800" y="530352"/>
-            <a:ext cx="9317736" cy="164592"/>
+            <a:off x="640080" y="502920"/>
+            <a:ext cx="13844016" cy="164592"/>
           </a:xfrm>
           <a:prstGeom prst="rect">
             <a:avLst/>
@@ -1648,8 +1648,8 @@
         </p:nvSpPr>
         <p:spPr>
           <a:xfrm>
-            <a:off x="685800" y="749808"/>
-            <a:ext cx="9317736" cy="365760"/>
+            <a:off x="640080" y="722376"/>
+            <a:ext cx="13844016" cy="365760"/>
           </a:xfrm>
           <a:prstGeom prst="rect">
             <a:avLst/>
@@ -1687,8 +1687,8 @@
         </p:nvSpPr>
         <p:spPr>
           <a:xfrm>
-            <a:off x="685800" y="1280160"/>
-            <a:ext cx="3108960" cy="1755648"/>
+            <a:off x="640080" y="1298448"/>
+            <a:ext cx="1554480" cy="713232"/>
           </a:xfrm>
           <a:prstGeom prst="rect">
             <a:avLst/>
@@ -1709,8 +1709,313 @@
         </p:nvSpPr>
         <p:spPr>
           <a:xfrm>
-            <a:off x="813816" y="1389888"/>
-            <a:ext cx="2852928" cy="182880"/>
+            <a:off x="768096" y="1408176"/>
+            <a:ext cx="1298448" cy="182880"/>
+          </a:xfrm>
+          <a:prstGeom prst="rect">
+            <a:avLst/>
+          </a:prstGeom>
+          <a:noFill/>
+          <a:ln/>
+        </p:spPr>
+        <p:txBody>
+          <a:bodyPr wrap="square" lIns="0" tIns="0" rIns="0" bIns="0" rtlCol="0" anchor="ctr"/>
+          <a:lstStyle/>
+          <a:p>
+            <a:pPr indent="0" marL="0">
+              <a:buNone/>
+            </a:pPr>
+            <a:r>
+              <a:rPr lang="en-US" sz="950" b="1" spc="80" kern="0" dirty="0">
+                <a:solidFill>
+                  <a:srgbClr val="1A1A1A"/>
+                </a:solidFill>
+                <a:latin typeface="Arial" pitchFamily="34" charset="0"/>
+                <a:ea typeface="Arial" pitchFamily="34" charset="-122"/>
+                <a:cs typeface="Arial" pitchFamily="34" charset="-120"/>
+              </a:rPr>
+              <a:t>AD SOYAD</a:t>
+            </a:r>
+            <a:endParaRPr lang="en-US" sz="950" dirty="0"/>
+          </a:p>
+        </p:txBody>
+      </p:sp>
+      <p:sp>
+        <p:nvSpPr>
+          <p:cNvPr id="6" name="Shape 4"/>
+          <p:cNvSpPr/>
+          <p:nvPr/>
+        </p:nvSpPr>
+        <p:spPr>
+          <a:xfrm>
+            <a:off x="2395728" y="1298448"/>
+            <a:ext cx="1554480" cy="713232"/>
+          </a:xfrm>
+          <a:prstGeom prst="rect">
+            <a:avLst/>
+          </a:prstGeom>
+          <a:ln w="12700">
+            <a:solidFill>
+              <a:srgbClr val="1A1A1A"/>
+            </a:solidFill>
+            <a:prstDash val="solid"/>
+          </a:ln>
+        </p:spPr>
+      </p:sp>
+      <p:sp>
+        <p:nvSpPr>
+          <p:cNvPr id="7" name="Text 5"/>
+          <p:cNvSpPr txBox="1"/>
+          <p:nvPr/>
+        </p:nvSpPr>
+        <p:spPr>
+          <a:xfrm>
+            <a:off x="2523744" y="1408176"/>
+            <a:ext cx="1298448" cy="182880"/>
+          </a:xfrm>
+          <a:prstGeom prst="rect">
+            <a:avLst/>
+          </a:prstGeom>
+          <a:noFill/>
+          <a:ln/>
+        </p:spPr>
+        <p:txBody>
+          <a:bodyPr wrap="square" lIns="0" tIns="0" rIns="0" bIns="0" rtlCol="0" anchor="ctr"/>
+          <a:lstStyle/>
+          <a:p>
+            <a:pPr indent="0" marL="0">
+              <a:buNone/>
+            </a:pPr>
+            <a:r>
+              <a:rPr lang="en-US" sz="950" b="1" spc="80" kern="0" dirty="0">
+                <a:solidFill>
+                  <a:srgbClr val="1A1A1A"/>
+                </a:solidFill>
+                <a:latin typeface="Arial" pitchFamily="34" charset="0"/>
+                <a:ea typeface="Arial" pitchFamily="34" charset="-122"/>
+                <a:cs typeface="Arial" pitchFamily="34" charset="-120"/>
+              </a:rPr>
+              <a:t>ÖĞRENCİ NO</a:t>
+            </a:r>
+            <a:endParaRPr lang="en-US" sz="950" dirty="0"/>
+          </a:p>
+        </p:txBody>
+      </p:sp>
+      <p:sp>
+        <p:nvSpPr>
+          <p:cNvPr id="8" name="Shape 6"/>
+          <p:cNvSpPr/>
+          <p:nvPr/>
+        </p:nvSpPr>
+        <p:spPr>
+          <a:xfrm>
+            <a:off x="4151376" y="1298448"/>
+            <a:ext cx="1554480" cy="713232"/>
+          </a:xfrm>
+          <a:prstGeom prst="rect">
+            <a:avLst/>
+          </a:prstGeom>
+          <a:ln w="12700">
+            <a:solidFill>
+              <a:srgbClr val="1A1A1A"/>
+            </a:solidFill>
+            <a:prstDash val="solid"/>
+          </a:ln>
+        </p:spPr>
+      </p:sp>
+      <p:sp>
+        <p:nvSpPr>
+          <p:cNvPr id="9" name="Text 7"/>
+          <p:cNvSpPr txBox="1"/>
+          <p:nvPr/>
+        </p:nvSpPr>
+        <p:spPr>
+          <a:xfrm>
+            <a:off x="4279392" y="1408176"/>
+            <a:ext cx="1298448" cy="182880"/>
+          </a:xfrm>
+          <a:prstGeom prst="rect">
+            <a:avLst/>
+          </a:prstGeom>
+          <a:noFill/>
+          <a:ln/>
+        </p:spPr>
+        <p:txBody>
+          <a:bodyPr wrap="square" lIns="0" tIns="0" rIns="0" bIns="0" rtlCol="0" anchor="ctr"/>
+          <a:lstStyle/>
+          <a:p>
+            <a:pPr indent="0" marL="0">
+              <a:buNone/>
+            </a:pPr>
+            <a:r>
+              <a:rPr lang="en-US" sz="950" b="1" spc="80" kern="0" dirty="0">
+                <a:solidFill>
+                  <a:srgbClr val="1A1A1A"/>
+                </a:solidFill>
+                <a:latin typeface="Arial" pitchFamily="34" charset="0"/>
+                <a:ea typeface="Arial" pitchFamily="34" charset="-122"/>
+                <a:cs typeface="Arial" pitchFamily="34" charset="-120"/>
+              </a:rPr>
+              <a:t>TARİH</a:t>
+            </a:r>
+            <a:endParaRPr lang="en-US" sz="950" dirty="0"/>
+          </a:p>
+        </p:txBody>
+      </p:sp>
+      <p:sp>
+        <p:nvSpPr>
+          <p:cNvPr id="10" name="Shape 8"/>
+          <p:cNvSpPr/>
+          <p:nvPr/>
+        </p:nvSpPr>
+        <p:spPr>
+          <a:xfrm>
+            <a:off x="640080" y="2212848"/>
+            <a:ext cx="2432304" cy="841248"/>
+          </a:xfrm>
+          <a:prstGeom prst="rect">
+            <a:avLst/>
+          </a:prstGeom>
+          <a:ln w="12700">
+            <a:solidFill>
+              <a:srgbClr val="1A1A1A"/>
+            </a:solidFill>
+            <a:prstDash val="solid"/>
+          </a:ln>
+        </p:spPr>
+      </p:sp>
+      <p:sp>
+        <p:nvSpPr>
+          <p:cNvPr id="11" name="Text 9"/>
+          <p:cNvSpPr txBox="1"/>
+          <p:nvPr/>
+        </p:nvSpPr>
+        <p:spPr>
+          <a:xfrm>
+            <a:off x="768096" y="2322576"/>
+            <a:ext cx="2176272" cy="182880"/>
+          </a:xfrm>
+          <a:prstGeom prst="rect">
+            <a:avLst/>
+          </a:prstGeom>
+          <a:noFill/>
+          <a:ln/>
+        </p:spPr>
+        <p:txBody>
+          <a:bodyPr wrap="square" lIns="0" tIns="0" rIns="0" bIns="0" rtlCol="0" anchor="ctr"/>
+          <a:lstStyle/>
+          <a:p>
+            <a:pPr indent="0" marL="0">
+              <a:buNone/>
+            </a:pPr>
+            <a:r>
+              <a:rPr lang="en-US" sz="950" b="1" spc="80" kern="0" dirty="0">
+                <a:solidFill>
+                  <a:srgbClr val="1A1A1A"/>
+                </a:solidFill>
+                <a:latin typeface="Arial" pitchFamily="34" charset="0"/>
+                <a:ea typeface="Arial" pitchFamily="34" charset="-122"/>
+                <a:cs typeface="Arial" pitchFamily="34" charset="-120"/>
+              </a:rPr>
+              <a:t>ESER ADI</a:t>
+            </a:r>
+            <a:endParaRPr lang="en-US" sz="950" dirty="0"/>
+          </a:p>
+        </p:txBody>
+      </p:sp>
+      <p:sp>
+        <p:nvSpPr>
+          <p:cNvPr id="12" name="Shape 10"/>
+          <p:cNvSpPr/>
+          <p:nvPr/>
+        </p:nvSpPr>
+        <p:spPr>
+          <a:xfrm>
+            <a:off x="3273552" y="2212848"/>
+            <a:ext cx="2432304" cy="841248"/>
+          </a:xfrm>
+          <a:prstGeom prst="rect">
+            <a:avLst/>
+          </a:prstGeom>
+          <a:ln w="12700">
+            <a:solidFill>
+              <a:srgbClr val="1A1A1A"/>
+            </a:solidFill>
+            <a:prstDash val="solid"/>
+          </a:ln>
+        </p:spPr>
+      </p:sp>
+      <p:sp>
+        <p:nvSpPr>
+          <p:cNvPr id="13" name="Text 11"/>
+          <p:cNvSpPr txBox="1"/>
+          <p:nvPr/>
+        </p:nvSpPr>
+        <p:spPr>
+          <a:xfrm>
+            <a:off x="3401568" y="2322576"/>
+            <a:ext cx="2176272" cy="182880"/>
+          </a:xfrm>
+          <a:prstGeom prst="rect">
+            <a:avLst/>
+          </a:prstGeom>
+          <a:noFill/>
+          <a:ln/>
+        </p:spPr>
+        <p:txBody>
+          <a:bodyPr wrap="square" lIns="0" tIns="0" rIns="0" bIns="0" rtlCol="0" anchor="ctr"/>
+          <a:lstStyle/>
+          <a:p>
+            <a:pPr indent="0" marL="0">
+              <a:buNone/>
+            </a:pPr>
+            <a:r>
+              <a:rPr lang="en-US" sz="950" b="1" spc="80" kern="0" dirty="0">
+                <a:solidFill>
+                  <a:srgbClr val="1A1A1A"/>
+                </a:solidFill>
+                <a:latin typeface="Arial" pitchFamily="34" charset="0"/>
+                <a:ea typeface="Arial" pitchFamily="34" charset="-122"/>
+                <a:cs typeface="Arial" pitchFamily="34" charset="-120"/>
+              </a:rPr>
+              <a:t>SANATÇI</a:t>
+            </a:r>
+            <a:endParaRPr lang="en-US" sz="950" dirty="0"/>
+          </a:p>
+        </p:txBody>
+      </p:sp>
+      <p:sp>
+        <p:nvSpPr>
+          <p:cNvPr id="14" name="Shape 12"/>
+          <p:cNvSpPr/>
+          <p:nvPr/>
+        </p:nvSpPr>
+        <p:spPr>
+          <a:xfrm>
+            <a:off x="640080" y="3255264"/>
+            <a:ext cx="5065776" cy="1783080"/>
+          </a:xfrm>
+          <a:prstGeom prst="rect">
+            <a:avLst/>
+          </a:prstGeom>
+          <a:ln w="12700">
+            <a:solidFill>
+              <a:srgbClr val="1A1A1A"/>
+            </a:solidFill>
+            <a:prstDash val="solid"/>
+          </a:ln>
+        </p:spPr>
+      </p:sp>
+      <p:sp>
+        <p:nvSpPr>
+          <p:cNvPr id="15" name="Text 13"/>
+          <p:cNvSpPr txBox="1"/>
+          <p:nvPr/>
+        </p:nvSpPr>
+        <p:spPr>
+          <a:xfrm>
+            <a:off x="768096" y="3364992"/>
+            <a:ext cx="4809744" cy="182880"/>
           </a:xfrm>
           <a:prstGeom prst="rect">
             <a:avLst/>
@@ -1742,14 +2047,14 @@
       </p:sp>
       <p:sp>
         <p:nvSpPr>
-          <p:cNvPr id="6" name="Shape 4"/>
+          <p:cNvPr id="16" name="Shape 14"/>
           <p:cNvSpPr/>
           <p:nvPr/>
         </p:nvSpPr>
         <p:spPr>
           <a:xfrm>
-            <a:off x="685800" y="3236976"/>
-            <a:ext cx="3108960" cy="1517904"/>
+            <a:off x="640080" y="5239512"/>
+            <a:ext cx="5065776" cy="2542032"/>
           </a:xfrm>
           <a:prstGeom prst="rect">
             <a:avLst/>
@@ -1764,14 +2069,14 @@
       </p:sp>
       <p:sp>
         <p:nvSpPr>
-          <p:cNvPr id="7" name="Text 5"/>
+          <p:cNvPr id="17" name="Text 15"/>
           <p:cNvSpPr txBox="1"/>
           <p:nvPr/>
         </p:nvSpPr>
         <p:spPr>
           <a:xfrm>
-            <a:off x="813816" y="3346704"/>
-            <a:ext cx="2852928" cy="182880"/>
+            <a:off x="768096" y="5349240"/>
+            <a:ext cx="4809744" cy="182880"/>
           </a:xfrm>
           <a:prstGeom prst="rect">
             <a:avLst/>
@@ -1803,14 +2108,14 @@
       </p:sp>
       <p:sp>
         <p:nvSpPr>
-          <p:cNvPr id="8" name="Shape 6"/>
+          <p:cNvPr id="18" name="Shape 16"/>
           <p:cNvSpPr/>
           <p:nvPr/>
         </p:nvSpPr>
         <p:spPr>
           <a:xfrm>
-            <a:off x="3995928" y="1280160"/>
-            <a:ext cx="1868424" cy="713232"/>
+            <a:off x="640080" y="7982712"/>
+            <a:ext cx="5065776" cy="1892808"/>
           </a:xfrm>
           <a:prstGeom prst="rect">
             <a:avLst/>
@@ -1825,319 +2130,14 @@
       </p:sp>
       <p:sp>
         <p:nvSpPr>
-          <p:cNvPr id="9" name="Text 7"/>
-          <p:cNvSpPr txBox="1"/>
-          <p:nvPr/>
-        </p:nvSpPr>
-        <p:spPr>
-          <a:xfrm>
-            <a:off x="4123944" y="1389888"/>
-            <a:ext cx="1612392" cy="182880"/>
-          </a:xfrm>
-          <a:prstGeom prst="rect">
-            <a:avLst/>
-          </a:prstGeom>
-          <a:noFill/>
-          <a:ln/>
-        </p:spPr>
-        <p:txBody>
-          <a:bodyPr wrap="square" lIns="0" tIns="0" rIns="0" bIns="0" rtlCol="0" anchor="ctr"/>
-          <a:lstStyle/>
-          <a:p>
-            <a:pPr indent="0" marL="0">
-              <a:buNone/>
-            </a:pPr>
-            <a:r>
-              <a:rPr lang="en-US" sz="950" b="1" spc="80" kern="0" dirty="0">
-                <a:solidFill>
-                  <a:srgbClr val="1A1A1A"/>
-                </a:solidFill>
-                <a:latin typeface="Arial" pitchFamily="34" charset="0"/>
-                <a:ea typeface="Arial" pitchFamily="34" charset="-122"/>
-                <a:cs typeface="Arial" pitchFamily="34" charset="-120"/>
-              </a:rPr>
-              <a:t>AD SOYAD</a:t>
-            </a:r>
-            <a:endParaRPr lang="en-US" sz="950" dirty="0"/>
-          </a:p>
-        </p:txBody>
-      </p:sp>
-      <p:sp>
-        <p:nvSpPr>
-          <p:cNvPr id="10" name="Shape 8"/>
-          <p:cNvSpPr/>
-          <p:nvPr/>
-        </p:nvSpPr>
-        <p:spPr>
-          <a:xfrm>
-            <a:off x="6065520" y="1280160"/>
-            <a:ext cx="1868424" cy="713232"/>
-          </a:xfrm>
-          <a:prstGeom prst="rect">
-            <a:avLst/>
-          </a:prstGeom>
-          <a:ln w="12700">
-            <a:solidFill>
-              <a:srgbClr val="1A1A1A"/>
-            </a:solidFill>
-            <a:prstDash val="solid"/>
-          </a:ln>
-        </p:spPr>
-      </p:sp>
-      <p:sp>
-        <p:nvSpPr>
-          <p:cNvPr id="11" name="Text 9"/>
-          <p:cNvSpPr txBox="1"/>
-          <p:nvPr/>
-        </p:nvSpPr>
-        <p:spPr>
-          <a:xfrm>
-            <a:off x="6193536" y="1389888"/>
-            <a:ext cx="1612392" cy="182880"/>
-          </a:xfrm>
-          <a:prstGeom prst="rect">
-            <a:avLst/>
-          </a:prstGeom>
-          <a:noFill/>
-          <a:ln/>
-        </p:spPr>
-        <p:txBody>
-          <a:bodyPr wrap="square" lIns="0" tIns="0" rIns="0" bIns="0" rtlCol="0" anchor="ctr"/>
-          <a:lstStyle/>
-          <a:p>
-            <a:pPr indent="0" marL="0">
-              <a:buNone/>
-            </a:pPr>
-            <a:r>
-              <a:rPr lang="en-US" sz="950" b="1" spc="80" kern="0" dirty="0">
-                <a:solidFill>
-                  <a:srgbClr val="1A1A1A"/>
-                </a:solidFill>
-                <a:latin typeface="Arial" pitchFamily="34" charset="0"/>
-                <a:ea typeface="Arial" pitchFamily="34" charset="-122"/>
-                <a:cs typeface="Arial" pitchFamily="34" charset="-120"/>
-              </a:rPr>
-              <a:t>ÖĞRENCİ NO</a:t>
-            </a:r>
-            <a:endParaRPr lang="en-US" sz="950" dirty="0"/>
-          </a:p>
-        </p:txBody>
-      </p:sp>
-      <p:sp>
-        <p:nvSpPr>
-          <p:cNvPr id="12" name="Shape 10"/>
-          <p:cNvSpPr/>
-          <p:nvPr/>
-        </p:nvSpPr>
-        <p:spPr>
-          <a:xfrm>
-            <a:off x="8135112" y="1280160"/>
-            <a:ext cx="1868424" cy="713232"/>
-          </a:xfrm>
-          <a:prstGeom prst="rect">
-            <a:avLst/>
-          </a:prstGeom>
-          <a:ln w="12700">
-            <a:solidFill>
-              <a:srgbClr val="1A1A1A"/>
-            </a:solidFill>
-            <a:prstDash val="solid"/>
-          </a:ln>
-        </p:spPr>
-      </p:sp>
-      <p:sp>
-        <p:nvSpPr>
-          <p:cNvPr id="13" name="Text 11"/>
-          <p:cNvSpPr txBox="1"/>
-          <p:nvPr/>
-        </p:nvSpPr>
-        <p:spPr>
-          <a:xfrm>
-            <a:off x="8263128" y="1389888"/>
-            <a:ext cx="1612392" cy="182880"/>
-          </a:xfrm>
-          <a:prstGeom prst="rect">
-            <a:avLst/>
-          </a:prstGeom>
-          <a:noFill/>
-          <a:ln/>
-        </p:spPr>
-        <p:txBody>
-          <a:bodyPr wrap="square" lIns="0" tIns="0" rIns="0" bIns="0" rtlCol="0" anchor="ctr"/>
-          <a:lstStyle/>
-          <a:p>
-            <a:pPr indent="0" marL="0">
-              <a:buNone/>
-            </a:pPr>
-            <a:r>
-              <a:rPr lang="en-US" sz="950" b="1" spc="80" kern="0" dirty="0">
-                <a:solidFill>
-                  <a:srgbClr val="1A1A1A"/>
-                </a:solidFill>
-                <a:latin typeface="Arial" pitchFamily="34" charset="0"/>
-                <a:ea typeface="Arial" pitchFamily="34" charset="-122"/>
-                <a:cs typeface="Arial" pitchFamily="34" charset="-120"/>
-              </a:rPr>
-              <a:t>TARİH</a:t>
-            </a:r>
-            <a:endParaRPr lang="en-US" sz="950" dirty="0"/>
-          </a:p>
-        </p:txBody>
-      </p:sp>
-      <p:sp>
-        <p:nvSpPr>
-          <p:cNvPr id="14" name="Shape 12"/>
-          <p:cNvSpPr/>
-          <p:nvPr/>
-        </p:nvSpPr>
-        <p:spPr>
-          <a:xfrm>
-            <a:off x="3995928" y="2194560"/>
-            <a:ext cx="2903220" cy="841248"/>
-          </a:xfrm>
-          <a:prstGeom prst="rect">
-            <a:avLst/>
-          </a:prstGeom>
-          <a:ln w="12700">
-            <a:solidFill>
-              <a:srgbClr val="1A1A1A"/>
-            </a:solidFill>
-            <a:prstDash val="solid"/>
-          </a:ln>
-        </p:spPr>
-      </p:sp>
-      <p:sp>
-        <p:nvSpPr>
-          <p:cNvPr id="15" name="Text 13"/>
-          <p:cNvSpPr txBox="1"/>
-          <p:nvPr/>
-        </p:nvSpPr>
-        <p:spPr>
-          <a:xfrm>
-            <a:off x="4123944" y="2304288"/>
-            <a:ext cx="2647188" cy="182880"/>
-          </a:xfrm>
-          <a:prstGeom prst="rect">
-            <a:avLst/>
-          </a:prstGeom>
-          <a:noFill/>
-          <a:ln/>
-        </p:spPr>
-        <p:txBody>
-          <a:bodyPr wrap="square" lIns="0" tIns="0" rIns="0" bIns="0" rtlCol="0" anchor="ctr"/>
-          <a:lstStyle/>
-          <a:p>
-            <a:pPr indent="0" marL="0">
-              <a:buNone/>
-            </a:pPr>
-            <a:r>
-              <a:rPr lang="en-US" sz="950" b="1" spc="80" kern="0" dirty="0">
-                <a:solidFill>
-                  <a:srgbClr val="1A1A1A"/>
-                </a:solidFill>
-                <a:latin typeface="Arial" pitchFamily="34" charset="0"/>
-                <a:ea typeface="Arial" pitchFamily="34" charset="-122"/>
-                <a:cs typeface="Arial" pitchFamily="34" charset="-120"/>
-              </a:rPr>
-              <a:t>ESER ADI</a:t>
-            </a:r>
-            <a:endParaRPr lang="en-US" sz="950" dirty="0"/>
-          </a:p>
-        </p:txBody>
-      </p:sp>
-      <p:sp>
-        <p:nvSpPr>
-          <p:cNvPr id="16" name="Shape 14"/>
-          <p:cNvSpPr/>
-          <p:nvPr/>
-        </p:nvSpPr>
-        <p:spPr>
-          <a:xfrm>
-            <a:off x="7100316" y="2194560"/>
-            <a:ext cx="2903220" cy="841248"/>
-          </a:xfrm>
-          <a:prstGeom prst="rect">
-            <a:avLst/>
-          </a:prstGeom>
-          <a:ln w="12700">
-            <a:solidFill>
-              <a:srgbClr val="1A1A1A"/>
-            </a:solidFill>
-            <a:prstDash val="solid"/>
-          </a:ln>
-        </p:spPr>
-      </p:sp>
-      <p:sp>
-        <p:nvSpPr>
-          <p:cNvPr id="17" name="Text 15"/>
-          <p:cNvSpPr txBox="1"/>
-          <p:nvPr/>
-        </p:nvSpPr>
-        <p:spPr>
-          <a:xfrm>
-            <a:off x="7228332" y="2304288"/>
-            <a:ext cx="2647188" cy="182880"/>
-          </a:xfrm>
-          <a:prstGeom prst="rect">
-            <a:avLst/>
-          </a:prstGeom>
-          <a:noFill/>
-          <a:ln/>
-        </p:spPr>
-        <p:txBody>
-          <a:bodyPr wrap="square" lIns="0" tIns="0" rIns="0" bIns="0" rtlCol="0" anchor="ctr"/>
-          <a:lstStyle/>
-          <a:p>
-            <a:pPr indent="0" marL="0">
-              <a:buNone/>
-            </a:pPr>
-            <a:r>
-              <a:rPr lang="en-US" sz="950" b="1" spc="80" kern="0" dirty="0">
-                <a:solidFill>
-                  <a:srgbClr val="1A1A1A"/>
-                </a:solidFill>
-                <a:latin typeface="Arial" pitchFamily="34" charset="0"/>
-                <a:ea typeface="Arial" pitchFamily="34" charset="-122"/>
-                <a:cs typeface="Arial" pitchFamily="34" charset="-120"/>
-              </a:rPr>
-              <a:t>SANATÇI</a:t>
-            </a:r>
-            <a:endParaRPr lang="en-US" sz="950" dirty="0"/>
-          </a:p>
-        </p:txBody>
-      </p:sp>
-      <p:sp>
-        <p:nvSpPr>
-          <p:cNvPr id="18" name="Shape 16"/>
-          <p:cNvSpPr/>
-          <p:nvPr/>
-        </p:nvSpPr>
-        <p:spPr>
-          <a:xfrm>
-            <a:off x="3995928" y="3236976"/>
-            <a:ext cx="6007608" cy="1517904"/>
-          </a:xfrm>
-          <a:prstGeom prst="rect">
-            <a:avLst/>
-          </a:prstGeom>
-          <a:ln w="12700">
-            <a:solidFill>
-              <a:srgbClr val="1A1A1A"/>
-            </a:solidFill>
-            <a:prstDash val="solid"/>
-          </a:ln>
-        </p:spPr>
-      </p:sp>
-      <p:sp>
-        <p:nvSpPr>
           <p:cNvPr id="19" name="Text 17"/>
           <p:cNvSpPr txBox="1"/>
           <p:nvPr/>
         </p:nvSpPr>
         <p:spPr>
           <a:xfrm>
-            <a:off x="4123944" y="3346704"/>
-            <a:ext cx="5751576" cy="182880"/>
+            <a:off x="768096" y="8092440"/>
+            <a:ext cx="4809744" cy="182880"/>
           </a:xfrm>
           <a:prstGeom prst="rect">
             <a:avLst/>
@@ -2169,14 +2169,36 @@
       </p:sp>
       <p:sp>
         <p:nvSpPr>
-          <p:cNvPr id="20" name="Text 18"/>
+          <p:cNvPr id="20" name="Shape 18"/>
+          <p:cNvSpPr/>
+          <p:nvPr/>
+        </p:nvSpPr>
+        <p:spPr>
+          <a:xfrm>
+            <a:off x="5907024" y="1298448"/>
+            <a:ext cx="8577072" cy="8577072"/>
+          </a:xfrm>
+          <a:prstGeom prst="rect">
+            <a:avLst/>
+          </a:prstGeom>
+          <a:ln w="12700">
+            <a:solidFill>
+              <a:srgbClr val="1A1A1A"/>
+            </a:solidFill>
+            <a:prstDash val="solid"/>
+          </a:ln>
+        </p:spPr>
+      </p:sp>
+      <p:sp>
+        <p:nvSpPr>
+          <p:cNvPr id="21" name="Text 19"/>
           <p:cNvSpPr txBox="1"/>
           <p:nvPr/>
         </p:nvSpPr>
         <p:spPr>
           <a:xfrm>
-            <a:off x="685800" y="4956048"/>
-            <a:ext cx="9317736" cy="164592"/>
+            <a:off x="6035040" y="1408176"/>
+            <a:ext cx="8321040" cy="182880"/>
           </a:xfrm>
           <a:prstGeom prst="rect">
             <a:avLst/>
@@ -2208,36 +2230,14 @@
       </p:sp>
       <p:sp>
         <p:nvSpPr>
-          <p:cNvPr id="21" name="Shape 19"/>
-          <p:cNvSpPr/>
-          <p:nvPr/>
-        </p:nvSpPr>
-        <p:spPr>
-          <a:xfrm>
-            <a:off x="685800" y="5148072"/>
-            <a:ext cx="9317736" cy="9317736"/>
-          </a:xfrm>
-          <a:prstGeom prst="rect">
-            <a:avLst/>
-          </a:prstGeom>
-          <a:ln w="12700">
-            <a:solidFill>
-              <a:srgbClr val="1A1A1A"/>
-            </a:solidFill>
-            <a:prstDash val="solid"/>
-          </a:ln>
-        </p:spPr>
-      </p:sp>
-      <p:sp>
-        <p:nvSpPr>
           <p:cNvPr id="22" name="Text 20"/>
           <p:cNvSpPr txBox="1"/>
           <p:nvPr/>
         </p:nvSpPr>
         <p:spPr>
           <a:xfrm>
-            <a:off x="685800" y="14593824"/>
-            <a:ext cx="9317736" cy="164592"/>
+            <a:off x="640080" y="10021824"/>
+            <a:ext cx="13844016" cy="164592"/>
           </a:xfrm>
           <a:prstGeom prst="rect">
             <a:avLst/>
